--- a/figures/figure1_final.pptx
+++ b/figures/figure1_final.pptx
@@ -901,8 +901,8 @@
         </p:nvSpPr>
         <p:spPr>
           <a:xfrm flipH="1">
-            <a:off x="5335270" y="2424430"/>
-            <a:ext cx="395605" cy="1631950"/>
+            <a:off x="5269230" y="2077085"/>
+            <a:ext cx="461645" cy="1889125"/>
           </a:xfrm>
           <a:prstGeom prst="curvedRightArrow">
             <a:avLst>
@@ -976,7 +976,7 @@
         </p:blipFill>
         <p:spPr>
           <a:xfrm>
-            <a:off x="5202555" y="2247265"/>
+            <a:off x="5201920" y="1878330"/>
             <a:ext cx="457200" cy="394970"/>
           </a:xfrm>
           <a:prstGeom prst="rect">
@@ -1052,16 +1052,14 @@
           <a:noFill/>
         </p:spPr>
         <p:txBody>
-          <a:bodyPr wrap="square" lIns="0" tIns="0" rIns="0" bIns="0" rtlCol="0" anchor="ctr">
-            <a:normAutofit fontScale="90000"/>
-          </a:bodyPr>
+          <a:bodyPr wrap="square" lIns="0" tIns="0" rIns="0" bIns="0" rtlCol="0" anchor="ctr"/>
           <a:lstStyle/>
           <a:p>
             <a:pPr marL="0" indent="0" algn="ctr">
               <a:buNone/>
             </a:pPr>
             <a:r>
-              <a:rPr lang="en-US" sz="790" b="1" dirty="0">
+              <a:rPr lang="en-US" sz="800" b="1" dirty="0">
                 <a:solidFill>
                   <a:srgbClr val="164A8A"/>
                 </a:solidFill>
@@ -1071,7 +1069,14 @@
               </a:rPr>
               <a:t>Planning Role</a:t>
             </a:r>
-            <a:endParaRPr lang="en-US" sz="790" dirty="0"/>
+            <a:endParaRPr lang="en-US" sz="800" b="1" dirty="0">
+              <a:solidFill>
+                <a:srgbClr val="164A8A"/>
+              </a:solidFill>
+              <a:latin typeface="Arimo" pitchFamily="34" charset="0"/>
+              <a:ea typeface="Arimo" pitchFamily="34" charset="-122"/>
+              <a:cs typeface="Arimo" pitchFamily="34" charset="-120"/>
+            </a:endParaRPr>
           </a:p>
         </p:txBody>
       </p:sp>
@@ -1123,7 +1128,7 @@
         </p:nvSpPr>
         <p:spPr>
           <a:xfrm>
-            <a:off x="235775" y="861502"/>
+            <a:off x="235775" y="496377"/>
             <a:ext cx="1368425" cy="446405"/>
           </a:xfrm>
           <a:prstGeom prst="roundRect">
@@ -1150,7 +1155,7 @@
         </p:nvSpPr>
         <p:spPr>
           <a:xfrm>
-            <a:off x="323002" y="942675"/>
+            <a:off x="323002" y="577550"/>
             <a:ext cx="1203656" cy="113164"/>
           </a:xfrm>
           <a:prstGeom prst="rect">
@@ -1166,7 +1171,7 @@
               <a:buNone/>
             </a:pPr>
             <a:r>
-              <a:rPr lang="en-US" sz="700" b="1" dirty="0">
+              <a:rPr lang="en-US" sz="800" b="1" dirty="0">
                 <a:solidFill>
                   <a:srgbClr val="286E29"/>
                 </a:solidFill>
@@ -1176,7 +1181,7 @@
               </a:rPr>
               <a:t>Affordance Role</a:t>
             </a:r>
-            <a:endParaRPr lang="en-US" sz="700" b="1" dirty="0">
+            <a:endParaRPr lang="en-US" sz="800" b="1" dirty="0">
               <a:solidFill>
                 <a:srgbClr val="286E29"/>
               </a:solidFill>
@@ -1195,7 +1200,7 @@
         </p:nvSpPr>
         <p:spPr>
           <a:xfrm>
-            <a:off x="312779" y="1086511"/>
+            <a:off x="312779" y="721386"/>
             <a:ext cx="1213943" cy="180034"/>
           </a:xfrm>
           <a:prstGeom prst="rect">
@@ -1296,7 +1301,7 @@
         </p:spPr>
         <p:txBody>
           <a:bodyPr wrap="square" lIns="0" tIns="0" rIns="0" bIns="0" rtlCol="0" anchor="ctr">
-            <a:normAutofit/>
+            <a:normAutofit fontScale="90000"/>
           </a:bodyPr>
           <a:lstStyle/>
           <a:p>
@@ -1373,7 +1378,7 @@
         </p:nvSpPr>
         <p:spPr>
           <a:xfrm>
-            <a:off x="4192460" y="868487"/>
+            <a:off x="4191825" y="499552"/>
             <a:ext cx="1347470" cy="461645"/>
           </a:xfrm>
           <a:prstGeom prst="roundRect">
@@ -1400,7 +1405,7 @@
         </p:nvSpPr>
         <p:spPr>
           <a:xfrm>
-            <a:off x="4274964" y="954105"/>
+            <a:off x="4274329" y="585170"/>
             <a:ext cx="1213943" cy="113164"/>
           </a:xfrm>
           <a:prstGeom prst="rect">
@@ -1416,7 +1421,7 @@
               <a:buNone/>
             </a:pPr>
             <a:r>
-              <a:rPr lang="en-US" sz="700" b="1" dirty="0">
+              <a:rPr lang="en-US" sz="800" b="1" dirty="0">
                 <a:solidFill>
                   <a:srgbClr val="9A5A00"/>
                 </a:solidFill>
@@ -1426,7 +1431,7 @@
               </a:rPr>
               <a:t>Verification Role</a:t>
             </a:r>
-            <a:endParaRPr lang="en-US" sz="700" b="1" dirty="0">
+            <a:endParaRPr lang="en-US" sz="800" b="1" dirty="0">
               <a:solidFill>
                 <a:srgbClr val="9A5A00"/>
               </a:solidFill>
@@ -1445,7 +1450,7 @@
         </p:nvSpPr>
         <p:spPr>
           <a:xfrm>
-            <a:off x="4285252" y="1108736"/>
+            <a:off x="4284617" y="739801"/>
             <a:ext cx="1193368" cy="180034"/>
           </a:xfrm>
           <a:prstGeom prst="rect">
@@ -1663,8 +1668,8 @@
         </p:nvSpPr>
         <p:spPr>
           <a:xfrm>
-            <a:off x="405368" y="1585462"/>
-            <a:ext cx="956752" cy="180034"/>
+            <a:off x="384810" y="1268095"/>
+            <a:ext cx="977265" cy="347345"/>
           </a:xfrm>
           <a:prstGeom prst="roundRect">
             <a:avLst>
@@ -1690,8 +1695,8 @@
         </p:nvSpPr>
         <p:spPr>
           <a:xfrm>
-            <a:off x="446454" y="1626421"/>
-            <a:ext cx="884738" cy="113164"/>
+            <a:off x="356870" y="1292225"/>
+            <a:ext cx="1005205" cy="323215"/>
           </a:xfrm>
           <a:prstGeom prst="rect">
             <a:avLst/>
@@ -1700,7 +1705,7 @@
         </p:spPr>
         <p:txBody>
           <a:bodyPr wrap="square" lIns="0" tIns="0" rIns="0" bIns="0" rtlCol="0" anchor="ctr">
-            <a:normAutofit/>
+            <a:noAutofit/>
           </a:bodyPr>
           <a:lstStyle/>
           <a:p>
@@ -1708,7 +1713,7 @@
               <a:buNone/>
             </a:pPr>
             <a:r>
-              <a:rPr lang="en-US" sz="600" b="1" dirty="0">
+              <a:rPr lang="en-US" sz="800" b="1" dirty="0">
                 <a:solidFill>
                   <a:srgbClr val="2F7C2B"/>
                 </a:solidFill>
@@ -1716,9 +1721,9 @@
                 <a:ea typeface="Arimo" pitchFamily="34" charset="-122"/>
                 <a:cs typeface="Arimo" pitchFamily="34" charset="-120"/>
               </a:rPr>
-              <a:t>Scene observation</a:t>
-            </a:r>
-            <a:endParaRPr lang="en-US" sz="600" b="1" dirty="0">
+              <a:t>Scene </a:t>
+            </a:r>
+            <a:endParaRPr lang="en-US" sz="800" b="1" dirty="0">
               <a:solidFill>
                 <a:srgbClr val="2F7C2B"/>
               </a:solidFill>
@@ -1727,6 +1732,30 @@
               <a:cs typeface="Arimo" pitchFamily="34" charset="-120"/>
             </a:endParaRPr>
           </a:p>
+          <a:p>
+            <a:pPr marL="0" indent="0" algn="ctr">
+              <a:buNone/>
+            </a:pPr>
+            <a:r>
+              <a:rPr lang="en-US" sz="800" b="1" dirty="0">
+                <a:solidFill>
+                  <a:srgbClr val="2F7C2B"/>
+                </a:solidFill>
+                <a:latin typeface="Arimo" pitchFamily="34" charset="0"/>
+                <a:ea typeface="Arimo" pitchFamily="34" charset="-122"/>
+                <a:cs typeface="Arimo" pitchFamily="34" charset="-120"/>
+              </a:rPr>
+              <a:t>observation</a:t>
+            </a:r>
+            <a:endParaRPr lang="en-US" sz="800" b="1" dirty="0">
+              <a:solidFill>
+                <a:srgbClr val="2F7C2B"/>
+              </a:solidFill>
+              <a:latin typeface="Arimo" pitchFamily="34" charset="0"/>
+              <a:ea typeface="Arimo" pitchFamily="34" charset="-122"/>
+              <a:cs typeface="Arimo" pitchFamily="34" charset="-120"/>
+            </a:endParaRPr>
+          </a:p>
         </p:txBody>
       </p:sp>
       <p:sp>
@@ -1737,7 +1766,7 @@
         </p:nvSpPr>
         <p:spPr>
           <a:xfrm>
-            <a:off x="4285170" y="1684462"/>
+            <a:off x="4284535" y="1315527"/>
             <a:ext cx="445770" cy="215900"/>
           </a:xfrm>
           <a:prstGeom prst="rect">
@@ -1820,8 +1849,8 @@
         </p:nvSpPr>
         <p:spPr>
           <a:xfrm rot="10800000">
-            <a:off x="888887" y="1307695"/>
-            <a:ext cx="0" cy="277767"/>
+            <a:off x="888365" y="942975"/>
+            <a:ext cx="635" cy="322580"/>
           </a:xfrm>
           <a:prstGeom prst="line">
             <a:avLst/>
@@ -1844,8 +1873,8 @@
         </p:nvSpPr>
         <p:spPr>
           <a:xfrm rot="10800000">
-            <a:off x="883807" y="1780736"/>
-            <a:ext cx="0" cy="293198"/>
+            <a:off x="883285" y="1615440"/>
+            <a:ext cx="635" cy="318770"/>
           </a:xfrm>
           <a:prstGeom prst="line">
             <a:avLst/>
@@ -2061,7 +2090,7 @@
         </p:blipFill>
         <p:spPr>
           <a:xfrm>
-            <a:off x="760285" y="2071177"/>
+            <a:off x="760285" y="1911792"/>
             <a:ext cx="246380" cy="246380"/>
           </a:xfrm>
           <a:prstGeom prst="rect">
@@ -2090,15 +2119,13 @@
           <a:noFill/>
         </p:spPr>
         <p:txBody>
-          <a:bodyPr wrap="square" lIns="0" tIns="0" rIns="0" bIns="0" rtlCol="0" anchor="ctr">
-            <a:normAutofit fontScale="90000"/>
-          </a:bodyPr>
+          <a:bodyPr wrap="square" lIns="0" tIns="0" rIns="0" bIns="0" rtlCol="0" anchor="ctr"/>
           <a:p>
             <a:pPr marL="0" indent="0" algn="ctr">
               <a:buNone/>
             </a:pPr>
             <a:r>
-              <a:rPr lang="en-US" sz="790" b="1" dirty="0">
+              <a:rPr lang="en-US" sz="800" b="1" dirty="0">
                 <a:solidFill>
                   <a:schemeClr val="accent4">
                     <a:lumMod val="50000"/>
@@ -2110,7 +2137,7 @@
               </a:rPr>
               <a:t>Task Instruction</a:t>
             </a:r>
-            <a:endParaRPr lang="en-US" sz="790" b="1" dirty="0">
+            <a:endParaRPr lang="en-US" sz="800" b="1" dirty="0">
               <a:solidFill>
                 <a:schemeClr val="accent4">
                   <a:lumMod val="50000"/>
@@ -2139,7 +2166,7 @@
         </p:blipFill>
         <p:spPr>
           <a:xfrm>
-            <a:off x="4392485" y="1905442"/>
+            <a:off x="4391850" y="1536507"/>
             <a:ext cx="231140" cy="231140"/>
           </a:xfrm>
           <a:prstGeom prst="rect">
@@ -2219,7 +2246,7 @@
         </p:blipFill>
         <p:spPr>
           <a:xfrm>
-            <a:off x="4273105" y="868487"/>
+            <a:off x="4272470" y="499552"/>
             <a:ext cx="187325" cy="187325"/>
           </a:xfrm>
           <a:prstGeom prst="rect">
@@ -2247,7 +2274,7 @@
         </p:blipFill>
         <p:spPr>
           <a:xfrm>
-            <a:off x="322770" y="868487"/>
+            <a:off x="322770" y="503362"/>
             <a:ext cx="187325" cy="187325"/>
           </a:xfrm>
           <a:prstGeom prst="rect">
@@ -2275,7 +2302,7 @@
         </p:blipFill>
         <p:spPr>
           <a:xfrm>
-            <a:off x="5414835" y="1905442"/>
+            <a:off x="5414200" y="1536507"/>
             <a:ext cx="186690" cy="215900"/>
           </a:xfrm>
           <a:prstGeom prst="rect">
@@ -2295,7 +2322,7 @@
         </p:nvSpPr>
         <p:spPr>
           <a:xfrm rot="10800000">
-            <a:off x="4891405" y="2303145"/>
+            <a:off x="4890770" y="1934210"/>
             <a:ext cx="852805" cy="338455"/>
           </a:xfrm>
           <a:prstGeom prst="wedgeRectCallout">
@@ -2346,7 +2373,7 @@
         </p:nvSpPr>
         <p:spPr>
           <a:xfrm>
-            <a:off x="4891405" y="2303145"/>
+            <a:off x="4890770" y="1934210"/>
             <a:ext cx="868680" cy="339090"/>
           </a:xfrm>
           <a:prstGeom prst="rect">
@@ -2428,7 +2455,7 @@
         </p:blipFill>
         <p:spPr>
           <a:xfrm>
-            <a:off x="4908740" y="1913062"/>
+            <a:off x="4908105" y="1544127"/>
             <a:ext cx="230505" cy="230505"/>
           </a:xfrm>
           <a:prstGeom prst="rect">
@@ -2448,7 +2475,7 @@
         </p:nvSpPr>
         <p:spPr>
           <a:xfrm>
-            <a:off x="4798885" y="1684462"/>
+            <a:off x="4798250" y="1315527"/>
             <a:ext cx="445770" cy="215900"/>
           </a:xfrm>
           <a:prstGeom prst="rect">
@@ -2509,7 +2536,7 @@
         </p:nvSpPr>
         <p:spPr>
           <a:xfrm>
-            <a:off x="5285295" y="1689542"/>
+            <a:off x="5284660" y="1320607"/>
             <a:ext cx="445770" cy="215900"/>
           </a:xfrm>
           <a:prstGeom prst="rect">
@@ -2638,8 +2665,8 @@
         </p:nvCxnSpPr>
         <p:spPr>
           <a:xfrm>
-            <a:off x="1604200" y="1085022"/>
-            <a:ext cx="494030" cy="433705"/>
+            <a:off x="1604010" y="720090"/>
+            <a:ext cx="494030" cy="798830"/>
           </a:xfrm>
           <a:prstGeom prst="curvedConnector3">
             <a:avLst>
@@ -2673,12 +2700,12 @@
         </p:nvCxnSpPr>
         <p:spPr>
           <a:xfrm rot="10800000" flipV="1">
-            <a:off x="3630930" y="1099820"/>
-            <a:ext cx="561340" cy="419100"/>
+            <a:off x="3630930" y="730885"/>
+            <a:ext cx="560705" cy="788035"/>
           </a:xfrm>
           <a:prstGeom prst="curvedConnector3">
             <a:avLst>
-              <a:gd name="adj1" fmla="val 50000"/>
+              <a:gd name="adj1" fmla="val 49943"/>
             </a:avLst>
           </a:prstGeom>
         </p:spPr>
@@ -2697,63 +2724,6 @@
           </a:fontRef>
         </p:style>
       </p:cxnSp>
-      <p:sp>
-        <p:nvSpPr>
-          <p:cNvPr id="68" name="矩形 67"/>
-          <p:cNvSpPr/>
-          <p:nvPr/>
-        </p:nvSpPr>
-        <p:spPr>
-          <a:xfrm rot="540000">
-            <a:off x="2357945" y="2782377"/>
-            <a:ext cx="1824355" cy="267970"/>
-          </a:xfrm>
-          <a:prstGeom prst="rect">
-            <a:avLst/>
-          </a:prstGeom>
-          <a:noFill/>
-          <a:ln>
-            <a:noFill/>
-          </a:ln>
-        </p:spPr>
-        <p:txBody>
-          <a:bodyPr wrap="none" rtlCol="0" anchor="t">
-            <a:noAutofit/>
-          </a:bodyPr>
-          <a:p>
-            <a:pPr algn="ctr"/>
-            <a:r>
-              <a:rPr lang="en-US" altLang="zh-CN" sz="1200" b="1" i="1">
-                <a:solidFill>
-                  <a:schemeClr val="accent1"/>
-                </a:solidFill>
-                <a:effectLst>
-                  <a:outerShdw blurRad="38100" dist="25400" dir="5400000" algn="ctr" rotWithShape="0">
-                    <a:srgbClr val="6E747A">
-                      <a:alpha val="43000"/>
-                      <a:alpha val="43000"/>
-                    </a:srgbClr>
-                  </a:outerShdw>
-                </a:effectLst>
-              </a:rPr>
-              <a:t>Conveyor Moving</a:t>
-            </a:r>
-            <a:endParaRPr lang="en-US" altLang="zh-CN" sz="1200" b="1" i="1">
-              <a:solidFill>
-                <a:schemeClr val="accent1"/>
-              </a:solidFill>
-              <a:effectLst>
-                <a:outerShdw blurRad="38100" dist="25400" dir="5400000" algn="ctr" rotWithShape="0">
-                  <a:srgbClr val="6E747A">
-                    <a:alpha val="43000"/>
-                    <a:alpha val="43000"/>
-                  </a:srgbClr>
-                </a:outerShdw>
-              </a:effectLst>
-            </a:endParaRPr>
-          </a:p>
-        </p:txBody>
-      </p:sp>
       <p:cxnSp>
         <p:nvCxnSpPr>
           <p:cNvPr id="69" name="曲线连接符 68"/>
@@ -2765,7 +2735,7 @@
         </p:nvCxnSpPr>
         <p:spPr>
           <a:xfrm rot="16200000">
-            <a:off x="4509770" y="1328420"/>
+            <a:off x="4509135" y="959485"/>
             <a:ext cx="354330" cy="358140"/>
           </a:xfrm>
           <a:prstGeom prst="curvedConnector3">
@@ -2799,7 +2769,7 @@
         </p:nvCxnSpPr>
         <p:spPr>
           <a:xfrm rot="16200000" flipV="1">
-            <a:off x="4766945" y="1430655"/>
+            <a:off x="4766310" y="1061720"/>
             <a:ext cx="352425" cy="155575"/>
           </a:xfrm>
           <a:prstGeom prst="curvedConnector3">
@@ -2833,7 +2803,7 @@
         </p:nvCxnSpPr>
         <p:spPr>
           <a:xfrm rot="16200000" flipV="1">
-            <a:off x="5007610" y="1189355"/>
+            <a:off x="5006975" y="820420"/>
             <a:ext cx="357505" cy="642620"/>
           </a:xfrm>
           <a:prstGeom prst="curvedConnector2">
@@ -2857,13 +2827,77 @@
       </p:cxnSp>
       <p:sp>
         <p:nvSpPr>
+          <p:cNvPr id="76" name="Rounded Rectangular Callout 75"/>
+          <p:cNvSpPr/>
+          <p:nvPr>
+            <p:custDataLst>
+              <p:tags r:id="rId19"/>
+            </p:custDataLst>
+          </p:nvPr>
+        </p:nvSpPr>
+        <p:spPr>
+          <a:xfrm rot="10320000" flipH="1">
+            <a:off x="2291080" y="3674110"/>
+            <a:ext cx="1083310" cy="483870"/>
+          </a:xfrm>
+          <a:prstGeom prst="cloudCallout">
+            <a:avLst>
+              <a:gd name="adj1" fmla="val -48987"/>
+              <a:gd name="adj2" fmla="val 90329"/>
+            </a:avLst>
+          </a:prstGeom>
+          <a:solidFill>
+            <a:srgbClr val="F9F9F9"/>
+          </a:solidFill>
+          <a:ln w="8890">
+            <a:solidFill>
+              <a:srgbClr val="8E939A"/>
+            </a:solidFill>
+          </a:ln>
+        </p:spPr>
+        <p:style>
+          <a:lnRef idx="1">
+            <a:schemeClr val="accent1"/>
+          </a:lnRef>
+          <a:fillRef idx="3">
+            <a:schemeClr val="accent1"/>
+          </a:fillRef>
+          <a:effectRef idx="2">
+            <a:schemeClr val="accent1"/>
+          </a:effectRef>
+          <a:fontRef idx="minor">
+            <a:schemeClr val="lt1"/>
+          </a:fontRef>
+        </p:style>
+        <p:txBody>
+          <a:bodyPr lIns="64008" rIns="64008" bIns="41148" rtlCol="0" anchor="ctr"/>
+          <a:p>
+            <a:pPr algn="ctr">
+              <a:spcBef>
+                <a:spcPts val="0"/>
+              </a:spcBef>
+              <a:spcAft>
+                <a:spcPts val="0"/>
+              </a:spcAft>
+            </a:pPr>
+            <a:endParaRPr sz="870" b="0" i="1">
+              <a:solidFill>
+                <a:srgbClr val="42464C"/>
+              </a:solidFill>
+              <a:latin typeface="Arial" panose="020B0604020202090204"/>
+            </a:endParaRPr>
+          </a:p>
+        </p:txBody>
+      </p:sp>
+      <p:sp>
+        <p:nvSpPr>
           <p:cNvPr id="72" name="矩形 71"/>
           <p:cNvSpPr/>
           <p:nvPr/>
         </p:nvSpPr>
         <p:spPr>
           <a:xfrm rot="480000">
-            <a:off x="3700970" y="3640897"/>
+            <a:off x="3657790" y="3550727"/>
             <a:ext cx="1948815" cy="281305"/>
           </a:xfrm>
           <a:prstGeom prst="rect">
@@ -2877,19 +2911,26 @@
         <p:txBody>
           <a:bodyPr wrap="none" rtlCol="0" anchor="t">
             <a:noAutofit/>
+            <a:scene3d>
+              <a:camera prst="orthographicFront"/>
+              <a:lightRig rig="soft" dir="t">
+                <a:rot lat="0" lon="0" rev="15600000"/>
+              </a:lightRig>
+            </a:scene3d>
+            <a:sp3d extrusionH="57150" prstMaterial="softEdge">
+              <a:bevelT w="25400" h="38100"/>
+            </a:sp3d>
           </a:bodyPr>
           <a:p>
-            <a:pPr algn="ctr"/>
-            <a:r>
-              <a:rPr lang="zh-CN" altLang="en-US" sz="800" i="1">
-                <a:ln w="9525">
-                  <a:solidFill>
-                    <a:schemeClr val="bg1"/>
-                  </a:solidFill>
-                  <a:prstDash val="solid"/>
-                </a:ln>
-                <a:solidFill>
-                  <a:schemeClr val="tx1"/>
+            <a:pPr lvl="0" algn="ctr">
+              <a:buClrTx/>
+              <a:buSzTx/>
+              <a:buFontTx/>
+            </a:pPr>
+            <a:r>
+              <a:rPr lang="en-US" altLang="zh-CN" sz="800" b="1" i="1">
+                <a:solidFill>
+                  <a:schemeClr val="bg1"/>
                 </a:solidFill>
                 <a:effectLst>
                   <a:outerShdw blurRad="12700" dist="38100" dir="2700000" algn="tl" rotWithShape="0">
@@ -2899,18 +2940,13 @@
                     </a:schemeClr>
                   </a:outerShdw>
                 </a:effectLst>
+                <a:sym typeface="+mn-ea"/>
               </a:rPr>
               <a:t>Downstream Suction </a:t>
             </a:r>
-            <a:endParaRPr lang="zh-CN" altLang="en-US" sz="800" i="1">
-              <a:ln w="9525">
-                <a:solidFill>
-                  <a:schemeClr val="bg1"/>
-                </a:solidFill>
-                <a:prstDash val="solid"/>
-              </a:ln>
+            <a:endParaRPr lang="en-US" altLang="zh-CN" sz="800" b="1" i="1">
               <a:solidFill>
-                <a:schemeClr val="tx1"/>
+                <a:schemeClr val="bg1"/>
               </a:solidFill>
               <a:effectLst>
                 <a:outerShdw blurRad="12700" dist="38100" dir="2700000" algn="tl" rotWithShape="0">
@@ -2920,20 +2956,19 @@
                   </a:schemeClr>
                 </a:outerShdw>
               </a:effectLst>
+              <a:sym typeface="+mn-ea"/>
             </a:endParaRPr>
           </a:p>
           <a:p>
-            <a:pPr algn="ctr"/>
-            <a:r>
-              <a:rPr lang="en-US" altLang="zh-CN" sz="800" i="1">
-                <a:ln w="9525">
-                  <a:solidFill>
-                    <a:schemeClr val="bg1"/>
-                  </a:solidFill>
-                  <a:prstDash val="solid"/>
-                </a:ln>
-                <a:solidFill>
-                  <a:schemeClr val="tx1"/>
+            <a:pPr lvl="0" algn="ctr">
+              <a:buClrTx/>
+              <a:buSzTx/>
+              <a:buFontTx/>
+            </a:pPr>
+            <a:r>
+              <a:rPr lang="en-US" altLang="zh-CN" sz="800" b="1" i="1">
+                <a:solidFill>
+                  <a:srgbClr val="FFC000"/>
                 </a:solidFill>
                 <a:effectLst>
                   <a:outerShdw blurRad="12700" dist="38100" dir="2700000" algn="tl" rotWithShape="0">
@@ -2943,19 +2978,14 @@
                     </a:schemeClr>
                   </a:outerShdw>
                 </a:effectLst>
-              </a:rPr>
-              <a:t>additionally </a:t>
-            </a:r>
-            <a:r>
-              <a:rPr lang="zh-CN" altLang="en-US" sz="800" i="1">
-                <a:ln w="9525">
-                  <a:solidFill>
-                    <a:schemeClr val="bg1"/>
-                  </a:solidFill>
-                  <a:prstDash val="solid"/>
-                </a:ln>
-                <a:solidFill>
-                  <a:schemeClr val="tx1"/>
+                <a:sym typeface="+mn-ea"/>
+              </a:rPr>
+              <a:t>additionally</a:t>
+            </a:r>
+            <a:r>
+              <a:rPr lang="en-US" altLang="zh-CN" sz="800" b="1" i="1">
+                <a:solidFill>
+                  <a:schemeClr val="bg1"/>
                 </a:solidFill>
                 <a:effectLst>
                   <a:outerShdw blurRad="12700" dist="38100" dir="2700000" algn="tl" rotWithShape="0">
@@ -2965,18 +2995,30 @@
                     </a:schemeClr>
                   </a:outerShdw>
                 </a:effectLst>
-              </a:rPr>
-              <a:t>holds cola can </a:t>
-            </a:r>
-            <a:endParaRPr lang="zh-CN" altLang="en-US" sz="800" i="1">
-              <a:ln w="9525">
-                <a:solidFill>
-                  <a:schemeClr val="bg1"/>
-                </a:solidFill>
-                <a:prstDash val="solid"/>
-              </a:ln>
+                <a:sym typeface="+mn-ea"/>
+              </a:rPr>
+              <a:t> holds cola can</a:t>
+            </a:r>
+            <a:r>
+              <a:rPr lang="en-US" altLang="zh-CN" sz="800" b="1" i="1">
+                <a:solidFill>
+                  <a:schemeClr val="accent4"/>
+                </a:solidFill>
+                <a:effectLst>
+                  <a:outerShdw blurRad="12700" dist="38100" dir="2700000" algn="tl" rotWithShape="0">
+                    <a:schemeClr val="bg1">
+                      <a:lumMod val="50000"/>
+                      <a:lumMod val="50000"/>
+                    </a:schemeClr>
+                  </a:outerShdw>
+                </a:effectLst>
+                <a:sym typeface="+mn-ea"/>
+              </a:rPr>
+              <a:t> </a:t>
+            </a:r>
+            <a:endParaRPr lang="en-US" altLang="zh-CN" sz="800" b="1" i="1">
               <a:solidFill>
-                <a:schemeClr val="tx1"/>
+                <a:schemeClr val="accent4"/>
               </a:solidFill>
               <a:effectLst>
                 <a:outerShdw blurRad="12700" dist="38100" dir="2700000" algn="tl" rotWithShape="0">
@@ -2986,6 +3028,72 @@
                   </a:schemeClr>
                 </a:outerShdw>
               </a:effectLst>
+              <a:sym typeface="+mn-ea"/>
+            </a:endParaRPr>
+          </a:p>
+        </p:txBody>
+      </p:sp>
+      <p:sp>
+        <p:nvSpPr>
+          <p:cNvPr id="26" name="矩形 25"/>
+          <p:cNvSpPr/>
+          <p:nvPr/>
+        </p:nvSpPr>
+        <p:spPr>
+          <a:xfrm rot="20880000">
+            <a:off x="2280285" y="3692525"/>
+            <a:ext cx="1180465" cy="394335"/>
+          </a:xfrm>
+          <a:prstGeom prst="rect">
+            <a:avLst/>
+          </a:prstGeom>
+          <a:noFill/>
+          <a:ln>
+            <a:noFill/>
+          </a:ln>
+          <a:effectLst>
+            <a:glow rad="1663700">
+              <a:schemeClr val="accent1">
+                <a:alpha val="40000"/>
+              </a:schemeClr>
+            </a:glow>
+          </a:effectLst>
+        </p:spPr>
+        <p:txBody>
+          <a:bodyPr wrap="none" rtlCol="0" anchor="t">
+            <a:noAutofit/>
+            <a:scene3d>
+              <a:camera prst="orthographicFront"/>
+              <a:lightRig rig="threePt" dir="t"/>
+            </a:scene3d>
+          </a:bodyPr>
+          <a:p>
+            <a:pPr lvl="0" algn="ctr">
+              <a:buClrTx/>
+              <a:buSzTx/>
+              <a:buFontTx/>
+            </a:pPr>
+            <a:endParaRPr lang="en-US" altLang="zh-CN" sz="1000" i="1">
+              <a:ln w="13462">
+                <a:solidFill>
+                  <a:schemeClr val="bg1"/>
+                </a:solidFill>
+                <a:prstDash val="solid"/>
+              </a:ln>
+              <a:solidFill>
+                <a:schemeClr val="tx1">
+                  <a:lumMod val="85000"/>
+                  <a:lumOff val="15000"/>
+                  <a:lumMod val="85000"/>
+                  <a:lumOff val="15000"/>
+                </a:schemeClr>
+              </a:solidFill>
+              <a:effectLst>
+                <a:outerShdw dist="38100" dir="2700000" algn="bl" rotWithShape="0">
+                  <a:schemeClr val="accent5"/>
+                </a:outerShdw>
+              </a:effectLst>
+              <a:sym typeface="+mn-ea"/>
             </a:endParaRPr>
           </a:p>
         </p:txBody>
@@ -2996,14 +3104,14 @@
           <p:cNvSpPr/>
           <p:nvPr>
             <p:custDataLst>
-              <p:tags r:id="rId19"/>
+              <p:tags r:id="rId20"/>
             </p:custDataLst>
           </p:nvPr>
         </p:nvSpPr>
         <p:spPr>
           <a:xfrm rot="480000">
-            <a:off x="-166815" y="2822382"/>
-            <a:ext cx="1948815" cy="281305"/>
+            <a:off x="361950" y="2839720"/>
+            <a:ext cx="905510" cy="233045"/>
           </a:xfrm>
           <a:prstGeom prst="rect">
             <a:avLst/>
@@ -3012,23 +3120,37 @@
           <a:ln>
             <a:noFill/>
           </a:ln>
+          <a:effectLst>
+            <a:outerShdw blurRad="50800" dist="38100" dir="5400000" sx="125000" sy="125000" algn="t" rotWithShape="0">
+              <a:schemeClr val="bg1">
+                <a:alpha val="55000"/>
+              </a:schemeClr>
+            </a:outerShdw>
+          </a:effectLst>
         </p:spPr>
         <p:txBody>
-          <a:bodyPr wrap="none" rtlCol="0" anchor="t">
+          <a:bodyPr wrap="none" lIns="91440" tIns="45720" rIns="91440" bIns="45720" rtlCol="0" anchor="t">
             <a:noAutofit/>
+            <a:scene3d>
+              <a:camera prst="orthographicFront"/>
+              <a:lightRig rig="soft" dir="t">
+                <a:rot lat="0" lon="0" rev="15600000"/>
+              </a:lightRig>
+            </a:scene3d>
+            <a:sp3d extrusionH="57150" prstMaterial="softEdge">
+              <a:bevelT w="25400" h="38100"/>
+            </a:sp3d>
           </a:bodyPr>
           <a:p>
-            <a:pPr algn="ctr"/>
-            <a:r>
-              <a:rPr lang="en-US" altLang="zh-CN" sz="800" i="1">
-                <a:ln w="9525">
-                  <a:solidFill>
-                    <a:schemeClr val="bg1"/>
-                  </a:solidFill>
-                  <a:prstDash val="solid"/>
-                </a:ln>
-                <a:solidFill>
-                  <a:schemeClr val="tx1"/>
+            <a:pPr lvl="0" algn="ctr">
+              <a:buClrTx/>
+              <a:buSzTx/>
+              <a:buFontTx/>
+            </a:pPr>
+            <a:r>
+              <a:rPr lang="en-US" altLang="zh-CN" sz="800" b="1" i="1">
+                <a:solidFill>
+                  <a:schemeClr val="bg1"/>
                 </a:solidFill>
                 <a:effectLst>
                   <a:outerShdw blurRad="12700" dist="38100" dir="2700000" algn="tl" rotWithShape="0">
@@ -3038,19 +3160,14 @@
                     </a:schemeClr>
                   </a:outerShdw>
                 </a:effectLst>
+                <a:sym typeface="+mn-ea"/>
               </a:rPr>
               <a:t>Up</a:t>
             </a:r>
             <a:r>
-              <a:rPr lang="zh-CN" altLang="en-US" sz="800" i="1">
-                <a:ln w="9525">
-                  <a:solidFill>
-                    <a:schemeClr val="bg1"/>
-                  </a:solidFill>
-                  <a:prstDash val="solid"/>
-                </a:ln>
-                <a:solidFill>
-                  <a:schemeClr val="tx1"/>
+              <a:rPr lang="en-US" altLang="zh-CN" sz="800" b="1" i="1">
+                <a:solidFill>
+                  <a:schemeClr val="bg1"/>
                 </a:solidFill>
                 <a:effectLst>
                   <a:outerShdw blurRad="12700" dist="38100" dir="2700000" algn="tl" rotWithShape="0">
@@ -3060,18 +3177,13 @@
                     </a:schemeClr>
                   </a:outerShdw>
                 </a:effectLst>
+                <a:sym typeface="+mn-ea"/>
               </a:rPr>
               <a:t>stream Suction </a:t>
             </a:r>
-            <a:endParaRPr lang="zh-CN" altLang="en-US" sz="800" i="1">
-              <a:ln w="9525">
-                <a:solidFill>
-                  <a:schemeClr val="bg1"/>
-                </a:solidFill>
-                <a:prstDash val="solid"/>
-              </a:ln>
+            <a:endParaRPr lang="en-US" altLang="zh-CN" sz="800" b="1" i="1">
               <a:solidFill>
-                <a:schemeClr val="tx1"/>
+                <a:schemeClr val="bg1"/>
               </a:solidFill>
               <a:effectLst>
                 <a:outerShdw blurRad="12700" dist="38100" dir="2700000" algn="tl" rotWithShape="0">
@@ -3081,20 +3193,19 @@
                   </a:schemeClr>
                 </a:outerShdw>
               </a:effectLst>
+              <a:sym typeface="+mn-ea"/>
             </a:endParaRPr>
           </a:p>
           <a:p>
-            <a:pPr algn="ctr"/>
-            <a:r>
-              <a:rPr lang="en-US" altLang="zh-CN" sz="800" i="1">
-                <a:ln w="9525">
-                  <a:solidFill>
-                    <a:schemeClr val="bg1"/>
-                  </a:solidFill>
-                  <a:prstDash val="solid"/>
-                </a:ln>
-                <a:solidFill>
-                  <a:schemeClr val="tx1"/>
+            <a:pPr lvl="0" algn="ctr">
+              <a:buClrTx/>
+              <a:buSzTx/>
+              <a:buFontTx/>
+            </a:pPr>
+            <a:r>
+              <a:rPr lang="en-US" altLang="zh-CN" sz="800" b="1" i="1">
+                <a:solidFill>
+                  <a:schemeClr val="bg1"/>
                 </a:solidFill>
                 <a:effectLst>
                   <a:outerShdw blurRad="12700" dist="38100" dir="2700000" algn="tl" rotWithShape="0">
@@ -3104,19 +3215,14 @@
                     </a:schemeClr>
                   </a:outerShdw>
                 </a:effectLst>
-              </a:rPr>
-              <a:t>pick </a:t>
-            </a:r>
-            <a:r>
-              <a:rPr lang="en-US" altLang="zh-CN" sz="800" i="1">
-                <a:ln w="9525">
-                  <a:solidFill>
-                    <a:schemeClr val="bg1"/>
-                  </a:solidFill>
-                  <a:prstDash val="solid"/>
-                </a:ln>
-                <a:solidFill>
-                  <a:schemeClr val="tx1"/>
+                <a:sym typeface="+mn-ea"/>
+              </a:rPr>
+              <a:t>pick up</a:t>
+            </a:r>
+            <a:r>
+              <a:rPr lang="en-US" altLang="zh-CN" sz="800" b="1" i="1">
+                <a:solidFill>
+                  <a:srgbClr val="FF0000"/>
                 </a:solidFill>
                 <a:effectLst>
                   <a:outerShdw blurRad="12700" dist="38100" dir="2700000" algn="tl" rotWithShape="0">
@@ -3126,19 +3232,14 @@
                     </a:schemeClr>
                   </a:outerShdw>
                 </a:effectLst>
-              </a:rPr>
-              <a:t>up cola</a:t>
-            </a:r>
-            <a:r>
-              <a:rPr lang="zh-CN" altLang="en-US" sz="800" i="1">
-                <a:ln w="9525">
-                  <a:solidFill>
-                    <a:schemeClr val="bg1"/>
-                  </a:solidFill>
-                  <a:prstDash val="solid"/>
-                </a:ln>
-                <a:solidFill>
-                  <a:schemeClr val="tx1"/>
+                <a:sym typeface="+mn-ea"/>
+              </a:rPr>
+              <a:t> </a:t>
+            </a:r>
+            <a:r>
+              <a:rPr lang="en-US" altLang="zh-CN" sz="800" b="1" i="1">
+                <a:solidFill>
+                  <a:srgbClr val="FFFF00"/>
                 </a:solidFill>
                 <a:effectLst>
                   <a:outerShdw blurRad="12700" dist="38100" dir="2700000" algn="tl" rotWithShape="0">
@@ -3148,18 +3249,64 @@
                     </a:schemeClr>
                   </a:outerShdw>
                 </a:effectLst>
+                <a:sym typeface="+mn-ea"/>
+              </a:rPr>
+              <a:t>fallen</a:t>
+            </a:r>
+            <a:r>
+              <a:rPr lang="en-US" altLang="zh-CN" sz="800" b="1" i="1">
+                <a:solidFill>
+                  <a:srgbClr val="D45774"/>
+                </a:solidFill>
+                <a:effectLst>
+                  <a:outerShdw blurRad="12700" dist="38100" dir="2700000" algn="tl" rotWithShape="0">
+                    <a:schemeClr val="bg1">
+                      <a:lumMod val="50000"/>
+                      <a:lumMod val="50000"/>
+                    </a:schemeClr>
+                  </a:outerShdw>
+                </a:effectLst>
+                <a:sym typeface="+mn-ea"/>
               </a:rPr>
               <a:t> </a:t>
             </a:r>
-            <a:endParaRPr lang="zh-CN" altLang="en-US" sz="800" i="1">
-              <a:ln w="9525">
+            <a:r>
+              <a:rPr lang="en-US" altLang="zh-CN" sz="800" b="1" i="1">
                 <a:solidFill>
                   <a:schemeClr val="bg1"/>
                 </a:solidFill>
-                <a:prstDash val="solid"/>
-              </a:ln>
+                <a:effectLst>
+                  <a:outerShdw blurRad="12700" dist="38100" dir="2700000" algn="tl" rotWithShape="0">
+                    <a:schemeClr val="bg1">
+                      <a:lumMod val="50000"/>
+                      <a:lumMod val="50000"/>
+                    </a:schemeClr>
+                  </a:outerShdw>
+                </a:effectLst>
+                <a:sym typeface="+mn-ea"/>
+              </a:rPr>
+              <a:t>cola</a:t>
+            </a:r>
+            <a:r>
+              <a:rPr lang="en-US" altLang="zh-CN" sz="800" b="1" i="1">
+                <a:solidFill>
+                  <a:schemeClr val="bg1"/>
+                </a:solidFill>
+                <a:effectLst>
+                  <a:outerShdw blurRad="12700" dist="38100" dir="2700000" algn="tl" rotWithShape="0">
+                    <a:schemeClr val="bg1">
+                      <a:lumMod val="50000"/>
+                      <a:lumMod val="50000"/>
+                    </a:schemeClr>
+                  </a:outerShdw>
+                </a:effectLst>
+                <a:sym typeface="+mn-ea"/>
+              </a:rPr>
+              <a:t> </a:t>
+            </a:r>
+            <a:endParaRPr lang="en-US" altLang="zh-CN" sz="800" b="1" i="1">
               <a:solidFill>
-                <a:schemeClr val="tx1"/>
+                <a:schemeClr val="bg1"/>
               </a:solidFill>
               <a:effectLst>
                 <a:outerShdw blurRad="12700" dist="38100" dir="2700000" algn="tl" rotWithShape="0">
@@ -3169,199 +3316,155 @@
                   </a:schemeClr>
                 </a:outerShdw>
               </a:effectLst>
+              <a:sym typeface="+mn-ea"/>
             </a:endParaRPr>
           </a:p>
         </p:txBody>
       </p:sp>
       <p:sp>
         <p:nvSpPr>
-          <p:cNvPr id="5" name="燕尾形箭头 4"/>
+          <p:cNvPr id="2" name="Right Arrow 71"/>
           <p:cNvSpPr/>
-          <p:nvPr/>
+          <p:nvPr>
+            <p:custDataLst>
+              <p:tags r:id="rId21"/>
+            </p:custDataLst>
+          </p:nvPr>
         </p:nvSpPr>
         <p:spPr>
           <a:xfrm rot="480000">
-            <a:off x="2684970" y="2953687"/>
-            <a:ext cx="935355" cy="219710"/>
-          </a:xfrm>
-          <a:prstGeom prst="notchedRightArrow">
+            <a:off x="2679192" y="3044952"/>
+            <a:ext cx="960120" cy="118872"/>
+          </a:xfrm>
+          <a:prstGeom prst="rightArrow">
             <a:avLst>
-              <a:gd name="adj1" fmla="val 51405"/>
-              <a:gd name="adj2" fmla="val 79240"/>
+              <a:gd name="adj1" fmla="val 28000"/>
+              <a:gd name="adj2" fmla="val 70000"/>
             </a:avLst>
           </a:prstGeom>
           <a:solidFill>
-            <a:schemeClr val="accent1">
-              <a:lumMod val="60000"/>
-              <a:lumOff val="40000"/>
-              <a:alpha val="71000"/>
-            </a:schemeClr>
+            <a:srgbClr val="375687"/>
           </a:solidFill>
-          <a:ln w="22225" cap="rnd" cmpd="sng">
-            <a:solidFill>
-              <a:schemeClr val="bg1"/>
-            </a:solidFill>
-            <a:prstDash val="solid"/>
-            <a:round/>
-            <a:headEnd type="none"/>
-            <a:tailEnd type="triangle" w="sm" len="sm"/>
+          <a:ln>
+            <a:noFill/>
           </a:ln>
-          <a:effectLst>
-            <a:outerShdw blurRad="50800" dist="38100" dir="5400000" sx="104000" sy="104000" algn="t" rotWithShape="0">
-              <a:schemeClr val="accent1">
-                <a:alpha val="80000"/>
-              </a:schemeClr>
-            </a:outerShdw>
-          </a:effectLst>
         </p:spPr>
         <p:style>
-          <a:lnRef idx="0">
-            <a:srgbClr val="FFFFFF"/>
+          <a:lnRef idx="1">
+            <a:schemeClr val="accent1"/>
           </a:lnRef>
-          <a:fillRef idx="0">
-            <a:srgbClr val="FFFFFF"/>
+          <a:fillRef idx="3">
+            <a:schemeClr val="accent1"/>
           </a:fillRef>
-          <a:effectRef idx="0">
-            <a:srgbClr val="FFFFFF"/>
+          <a:effectRef idx="2">
+            <a:schemeClr val="accent1"/>
           </a:effectRef>
           <a:fontRef idx="minor">
-            <a:schemeClr val="tx1"/>
-          </a:fontRef>
-        </p:style>
-        <p:txBody>
-          <a:bodyPr vertOverflow="overflow" horzOverflow="overflow" vert="horz" wrap="square" numCol="1" spcCol="0" rtlCol="0" fromWordArt="0" anchor="ctr" anchorCtr="0" forceAA="0" compatLnSpc="1">
-            <a:noAutofit/>
-          </a:bodyPr>
-          <a:p>
-            <a:pPr lvl="0" algn="ctr">
-              <a:buClrTx/>
-              <a:buSzTx/>
-              <a:buFontTx/>
-            </a:pPr>
-            <a:endParaRPr lang="zh-CN" altLang="en-US">
-              <a:sym typeface="+mn-ea"/>
-            </a:endParaRPr>
-          </a:p>
-        </p:txBody>
-      </p:sp>
-      <p:sp>
-        <p:nvSpPr>
-          <p:cNvPr id="20" name="云形标注 19"/>
-          <p:cNvSpPr/>
-          <p:nvPr/>
-        </p:nvSpPr>
-        <p:spPr>
-          <a:xfrm rot="9900000" flipH="1">
-            <a:off x="2367280" y="3640455"/>
-            <a:ext cx="1107440" cy="553085"/>
-          </a:xfrm>
-          <a:prstGeom prst="cloudCallout">
-            <a:avLst>
-              <a:gd name="adj1" fmla="val -54785"/>
-              <a:gd name="adj2" fmla="val 100293"/>
-            </a:avLst>
-          </a:prstGeom>
-          <a:solidFill>
-            <a:srgbClr val="FFFFFF">
-              <a:alpha val="13000"/>
-            </a:srgbClr>
-          </a:solidFill>
-          <a:ln w="12700" cap="flat" cmpd="sng">
-            <a:solidFill>
-              <a:schemeClr val="bg1">
-                <a:lumMod val="85000"/>
-              </a:schemeClr>
-            </a:solidFill>
-            <a:prstDash val="solid"/>
-            <a:miter lim="800000"/>
-            <a:headEnd type="none"/>
-            <a:tailEnd type="none"/>
-          </a:ln>
-          <a:effectLst>
-            <a:glow>
-              <a:schemeClr val="accent1">
-                <a:alpha val="40000"/>
-              </a:schemeClr>
-            </a:glow>
-            <a:outerShdw blurRad="50800" dist="50800" dir="5400000" algn="ctr" rotWithShape="0">
-              <a:srgbClr val="000000">
-                <a:alpha val="25000"/>
-              </a:srgbClr>
-            </a:outerShdw>
-          </a:effectLst>
-        </p:spPr>
-        <p:style>
-          <a:lnRef idx="2">
-            <a:schemeClr val="accent3"/>
-          </a:lnRef>
-          <a:fillRef idx="2">
-            <a:schemeClr val="accent3"/>
-          </a:fillRef>
-          <a:effectRef idx="0">
-            <a:srgbClr val="FFFFFF"/>
-          </a:effectRef>
-          <a:fontRef idx="minor">
-            <a:schemeClr val="dk1"/>
+            <a:schemeClr val="lt1"/>
           </a:fontRef>
         </p:style>
         <p:txBody>
           <a:bodyPr rtlCol="0" anchor="ctr"/>
           <a:p>
-            <a:pPr algn="ctr"/>
-            <a:endParaRPr lang="en-US" altLang="zh-CN" sz="1000" b="1" i="1"/>
+            <a:pPr algn="ctr">
+              <a:spcBef>
+                <a:spcPts val="0"/>
+              </a:spcBef>
+              <a:spcAft>
+                <a:spcPts val="0"/>
+              </a:spcAft>
+            </a:pPr>
           </a:p>
         </p:txBody>
       </p:sp>
       <p:sp>
         <p:nvSpPr>
-          <p:cNvPr id="26" name="文本框 25"/>
+          <p:cNvPr id="21" name="TextBox 72"/>
+          <p:cNvSpPr txBox="1"/>
+          <p:nvPr>
+            <p:custDataLst>
+              <p:tags r:id="rId22"/>
+            </p:custDataLst>
+          </p:nvPr>
+        </p:nvSpPr>
+        <p:spPr>
+          <a:xfrm rot="480000">
+            <a:off x="2596896" y="2825496"/>
+            <a:ext cx="1234440" cy="219456"/>
+          </a:xfrm>
+          <a:prstGeom prst="rect">
+            <a:avLst/>
+          </a:prstGeom>
+          <a:noFill/>
+        </p:spPr>
+        <p:txBody>
+          <a:bodyPr wrap="none" lIns="0" tIns="0" rIns="0" bIns="0" anchor="ctr">
+            <a:spAutoFit/>
+          </a:bodyPr>
+          <a:p>
+            <a:pPr algn="ctr">
+              <a:spcBef>
+                <a:spcPts val="0"/>
+              </a:spcBef>
+              <a:spcAft>
+                <a:spcPts val="0"/>
+              </a:spcAft>
+            </a:pPr>
+            <a:r>
+              <a:rPr sz="1040" b="1" i="0">
+                <a:solidFill>
+                  <a:srgbClr val="375687"/>
+                </a:solidFill>
+                <a:latin typeface="Arial" panose="020B0604020202090204"/>
+              </a:rPr>
+              <a:t>Conveyor Moving</a:t>
+            </a:r>
+            <a:endParaRPr sz="1040" b="1" i="0">
+              <a:solidFill>
+                <a:srgbClr val="375687"/>
+              </a:solidFill>
+              <a:latin typeface="Arial" panose="020B0604020202090204"/>
+            </a:endParaRPr>
+          </a:p>
+        </p:txBody>
+      </p:sp>
+      <p:sp>
+        <p:nvSpPr>
+          <p:cNvPr id="33" name="文本框 32"/>
           <p:cNvSpPr txBox="1"/>
           <p:nvPr/>
         </p:nvSpPr>
         <p:spPr>
-          <a:xfrm rot="20880000">
-            <a:off x="2422525" y="3707130"/>
-            <a:ext cx="1180465" cy="394335"/>
+          <a:xfrm rot="21300000">
+            <a:off x="2440305" y="3723640"/>
+            <a:ext cx="1242695" cy="358140"/>
           </a:xfrm>
           <a:prstGeom prst="rect">
             <a:avLst/>
           </a:prstGeom>
           <a:noFill/>
-          <a:ln>
-            <a:noFill/>
-          </a:ln>
         </p:spPr>
         <p:txBody>
           <a:bodyPr wrap="square" rtlCol="0">
-            <a:noAutofit/>
+            <a:spAutoFit/>
           </a:bodyPr>
           <a:p>
             <a:r>
-              <a:rPr lang="en-US" sz="930" b="1">
-                <a:solidFill>
-                  <a:schemeClr val="bg1"/>
+              <a:rPr sz="870" i="1">
+                <a:solidFill>
+                  <a:srgbClr val="42464C"/>
                 </a:solidFill>
                 <a:latin typeface="Arial" panose="020B0604020202090204"/>
                 <a:sym typeface="+mn-ea"/>
               </a:rPr>
-              <a:t>Sorry for dropping that</a:t>
-            </a:r>
-            <a:r>
-              <a:rPr lang="zh-CN" altLang="en-US" sz="930" b="1">
-                <a:solidFill>
-                  <a:schemeClr val="bg1"/>
-                </a:solidFill>
-                <a:latin typeface="Arial" panose="020B0604020202090204"/>
-                <a:sym typeface="+mn-ea"/>
-              </a:rPr>
-              <a:t>～</a:t>
-            </a:r>
-            <a:endParaRPr lang="zh-CN" altLang="en-US" sz="930" b="1">
+              <a:t>Sorry for
+dropping that～</a:t>
+            </a:r>
+            <a:endParaRPr sz="870" i="1">
               <a:solidFill>
-                <a:schemeClr val="bg1"/>
+                <a:srgbClr val="42464C"/>
               </a:solidFill>
               <a:latin typeface="Arial" panose="020B0604020202090204"/>
-              <a:sym typeface="+mn-ea"/>
             </a:endParaRPr>
           </a:p>
         </p:txBody>
@@ -3387,6 +3490,24 @@
 </file>
 
 <file path=ppt/tags/tag11.xml><?xml version="1.0" encoding="utf-8"?>
+<p:tagLst xmlns:p="http://schemas.openxmlformats.org/presentationml/2006/main">
+  <p:tag name="KSO_WM_BEAUTIFY_FLAG" val=""/>
+</p:tagLst>
+</file>
+
+<file path=ppt/tags/tag12.xml><?xml version="1.0" encoding="utf-8"?>
+<p:tagLst xmlns:p="http://schemas.openxmlformats.org/presentationml/2006/main">
+  <p:tag name="KSO_WM_BEAUTIFY_FLAG" val=""/>
+</p:tagLst>
+</file>
+
+<file path=ppt/tags/tag13.xml><?xml version="1.0" encoding="utf-8"?>
+<p:tagLst xmlns:p="http://schemas.openxmlformats.org/presentationml/2006/main">
+  <p:tag name="KSO_WM_BEAUTIFY_FLAG" val=""/>
+</p:tagLst>
+</file>
+
+<file path=ppt/tags/tag14.xml><?xml version="1.0" encoding="utf-8"?>
 <p:tagLst xmlns:p="http://schemas.openxmlformats.org/presentationml/2006/main">
   <p:tag name="KSO_WM_BEAUTIFY_FLAG" val=""/>
 </p:tagLst>

--- a/figures/figure1_final.pptx
+++ b/figures/figure1_final.pptx
@@ -8,7 +8,7 @@
     <p:notesMasterId r:id="rId4"/>
   </p:notesMasterIdLst>
   <p:sldIdLst>
-    <p:sldId id="256" r:id="rId3"/>
+    <p:sldId id="257" r:id="rId3"/>
   </p:sldIdLst>
   <p:sldSz cx="5759450" cy="4787900"/>
   <p:notesSz cx="6858000" cy="12191365"/>
@@ -473,54 +473,99 @@
       </p:grpSpPr>
       <p:sp>
         <p:nvSpPr>
-          <p:cNvPr id="2" name="Slide Image Placeholder 1"/>
+          <p:cNvPr id="96" name="PlaceHolder 1"/>
           <p:cNvSpPr>
-            <a:spLocks noGrp="1" noRot="1" noChangeAspect="1"/>
+            <a:spLocks noGrp="1"/>
           </p:cNvSpPr>
           <p:nvPr>
             <p:ph type="sldImg"/>
           </p:nvPr>
         </p:nvSpPr>
-        <p:spPr/>
-      </p:sp>
-      <p:sp>
-        <p:nvSpPr>
-          <p:cNvPr id="3" name="Notes Placeholder 2"/>
+        <p:spPr>
+          <a:xfrm>
+            <a:off x="1572840" y="1143000"/>
+            <a:ext cx="3712320" cy="3085920"/>
+          </a:xfrm>
+          <a:prstGeom prst="rect">
+            <a:avLst/>
+          </a:prstGeom>
+          <a:ln w="0">
+            <a:noFill/>
+          </a:ln>
+        </p:spPr>
+      </p:sp>
+      <p:sp>
+        <p:nvSpPr>
+          <p:cNvPr id="97" name="PlaceHolder 2"/>
           <p:cNvSpPr>
             <a:spLocks noGrp="1"/>
           </p:cNvSpPr>
           <p:nvPr>
-            <p:ph type="body" idx="1"/>
+            <p:ph type="body"/>
           </p:nvPr>
         </p:nvSpPr>
-        <p:spPr/>
+        <p:spPr>
+          <a:xfrm>
+            <a:off x="685800" y="4400640"/>
+            <a:ext cx="5486040" cy="3600000"/>
+          </a:xfrm>
+          <a:prstGeom prst="rect">
+            <a:avLst/>
+          </a:prstGeom>
+          <a:noFill/>
+          <a:ln w="0">
+            <a:noFill/>
+          </a:ln>
+        </p:spPr>
         <p:txBody>
-          <a:bodyPr/>
-          <a:lstStyle/>
+          <a:bodyPr anchor="t">
+            <a:noAutofit/>
+          </a:bodyPr>
           <a:p>
-            <a:endParaRPr lang="en-US" dirty="0"/>
+            <a:endParaRPr lang="en-US" sz="2000" b="0" strike="noStrike" spc="-1">
+              <a:latin typeface="Arial" panose="020B0604020202020204"/>
+            </a:endParaRPr>
           </a:p>
         </p:txBody>
       </p:sp>
       <p:sp>
         <p:nvSpPr>
-          <p:cNvPr id="4" name="Slide Number Placeholder 3"/>
+          <p:cNvPr id="98" name="PlaceHolder 3"/>
           <p:cNvSpPr>
             <a:spLocks noGrp="1"/>
           </p:cNvSpPr>
           <p:nvPr>
-            <p:ph type="sldNum" sz="quarter" idx="10"/>
+            <p:ph type="sldNum" idx="4"/>
           </p:nvPr>
         </p:nvSpPr>
-        <p:spPr/>
+        <p:spPr>
+          <a:xfrm>
+            <a:off x="3884760" y="8685360"/>
+            <a:ext cx="2971440" cy="458280"/>
+          </a:xfrm>
+          <a:prstGeom prst="rect">
+            <a:avLst/>
+          </a:prstGeom>
+          <a:noFill/>
+          <a:ln w="0">
+            <a:noFill/>
+          </a:ln>
+        </p:spPr>
         <p:txBody>
-          <a:bodyPr/>
-          <a:lstStyle/>
+          <a:bodyPr anchor="b">
+            <a:noAutofit/>
+          </a:bodyPr>
+          <a:lstStyle>
+            <a:lvl1pPr>
+              <a:defRPr lang="en-US" sz="2400" b="0" strike="noStrike" spc="-1">
+                <a:latin typeface="Times New Roman" panose="02020603050405020304"/>
+              </a:defRPr>
+            </a:lvl1pPr>
+          </a:lstStyle>
           <a:p>
-            <a:fld id="{F7021451-1387-4CA6-816F-3879F97B5CBC}" type="slidenum">
-              <a:rPr lang="en-US"/>
-            </a:fld>
-            <a:endParaRPr lang="en-US"/>
+            <a:endParaRPr lang="en-US" sz="2400" b="0" strike="noStrike" spc="-1">
+              <a:latin typeface="Times New Roman" panose="02020603050405020304"/>
+            </a:endParaRPr>
           </a:p>
         </p:txBody>
       </p:sp>
@@ -540,6 +585,31 @@
         <a:schemeClr val="bg1"/>
       </p:bgRef>
     </p:bg>
+    <p:spTree>
+      <p:nvGrpSpPr>
+        <p:cNvPr id="1" name=""/>
+        <p:cNvGrpSpPr/>
+        <p:nvPr/>
+      </p:nvGrpSpPr>
+      <p:grpSpPr>
+        <a:xfrm>
+          <a:off x="0" y="0"/>
+          <a:ext cx="0" cy="0"/>
+          <a:chOff x="0" y="0"/>
+          <a:chExt cx="0" cy="0"/>
+        </a:xfrm>
+      </p:grpSpPr>
+    </p:spTree>
+  </p:cSld>
+  <p:clrMapOvr>
+    <a:masterClrMapping/>
+  </p:clrMapOvr>
+</p:sldLayout>
+</file>
+
+<file path=ppt/slideLayouts/slideLayout2.xml><?xml version="1.0" encoding="utf-8"?>
+<p:sldLayout xmlns:a="http://schemas.openxmlformats.org/drawingml/2006/main" xmlns:r="http://schemas.openxmlformats.org/officeDocument/2006/relationships" xmlns:p="http://schemas.openxmlformats.org/presentationml/2006/main" type="blank" preserve="1">
+  <p:cSld name="Blank Slide">
     <p:spTree>
       <p:nvGrpSpPr>
         <p:cNvPr id="1" name=""/>
@@ -589,6 +659,7 @@
   <p:clrMap bg1="lt1" tx1="dk1" bg2="lt2" tx2="dk2" accent1="accent1" accent2="accent2" accent3="accent3" accent4="accent4" accent5="accent5" accent6="accent6" hlink="hlink" folHlink="folHlink"/>
   <p:sldLayoutIdLst>
     <p:sldLayoutId id="2147483649" r:id="rId1"/>
+    <p:sldLayoutId id="2147483650" r:id="rId2"/>
   </p:sldLayoutIdLst>
   <p:hf sldNum="0" hdr="0" ftr="0" dt="0"/>
   <p:txStyles>
@@ -613,7 +684,7 @@
         <a:spcBef>
           <a:spcPts val="60"/>
         </a:spcBef>
-        <a:buFont typeface="Arial" panose="020B0604020202090204" pitchFamily="34" charset="0"/>
+        <a:buFont typeface="Arial" panose="020B0604020202020204" pitchFamily="34" charset="0"/>
         <a:buChar char="•"/>
         <a:defRPr sz="2015" kern="1200">
           <a:solidFill>
@@ -628,7 +699,7 @@
         <a:spcBef>
           <a:spcPts val="60"/>
         </a:spcBef>
-        <a:buFont typeface="Arial" panose="020B0604020202090204" pitchFamily="34" charset="0"/>
+        <a:buFont typeface="Arial" panose="020B0604020202020204" pitchFamily="34" charset="0"/>
         <a:buChar char="–"/>
         <a:defRPr sz="1765" kern="1200">
           <a:solidFill>
@@ -643,7 +714,7 @@
         <a:spcBef>
           <a:spcPts val="60"/>
         </a:spcBef>
-        <a:buFont typeface="Arial" panose="020B0604020202090204" pitchFamily="34" charset="0"/>
+        <a:buFont typeface="Arial" panose="020B0604020202020204" pitchFamily="34" charset="0"/>
         <a:buChar char="•"/>
         <a:defRPr sz="1510" kern="1200">
           <a:solidFill>
@@ -658,7 +729,7 @@
         <a:spcBef>
           <a:spcPts val="60"/>
         </a:spcBef>
-        <a:buFont typeface="Arial" panose="020B0604020202090204" pitchFamily="34" charset="0"/>
+        <a:buFont typeface="Arial" panose="020B0604020202020204" pitchFamily="34" charset="0"/>
         <a:buChar char="–"/>
         <a:defRPr sz="1260" kern="1200">
           <a:solidFill>
@@ -673,7 +744,7 @@
         <a:spcBef>
           <a:spcPts val="60"/>
         </a:spcBef>
-        <a:buFont typeface="Arial" panose="020B0604020202090204" pitchFamily="34" charset="0"/>
+        <a:buFont typeface="Arial" panose="020B0604020202020204" pitchFamily="34" charset="0"/>
         <a:buChar char="»"/>
         <a:defRPr sz="1260" kern="1200">
           <a:solidFill>
@@ -688,7 +759,7 @@
         <a:spcBef>
           <a:spcPts val="60"/>
         </a:spcBef>
-        <a:buFont typeface="Arial" panose="020B0604020202090204" pitchFamily="34" charset="0"/>
+        <a:buFont typeface="Arial" panose="020B0604020202020204" pitchFamily="34" charset="0"/>
         <a:buChar char="•"/>
         <a:defRPr sz="1260" kern="1200">
           <a:solidFill>
@@ -703,7 +774,7 @@
         <a:spcBef>
           <a:spcPts val="60"/>
         </a:spcBef>
-        <a:buFont typeface="Arial" panose="020B0604020202090204" pitchFamily="34" charset="0"/>
+        <a:buFont typeface="Arial" panose="020B0604020202020204" pitchFamily="34" charset="0"/>
         <a:buChar char="•"/>
         <a:defRPr sz="1260" kern="1200">
           <a:solidFill>
@@ -718,7 +789,7 @@
         <a:spcBef>
           <a:spcPts val="60"/>
         </a:spcBef>
-        <a:buFont typeface="Arial" panose="020B0604020202090204" pitchFamily="34" charset="0"/>
+        <a:buFont typeface="Arial" panose="020B0604020202020204" pitchFamily="34" charset="0"/>
         <a:buChar char="•"/>
         <a:defRPr sz="1260" kern="1200">
           <a:solidFill>
@@ -733,7 +804,7 @@
         <a:spcBef>
           <a:spcPts val="60"/>
         </a:spcBef>
-        <a:buFont typeface="Arial" panose="020B0604020202090204" pitchFamily="34" charset="0"/>
+        <a:buFont typeface="Arial" panose="020B0604020202020204" pitchFamily="34" charset="0"/>
         <a:buChar char="•"/>
         <a:defRPr sz="1260" kern="1200">
           <a:solidFill>
@@ -847,14 +918,6 @@
 <file path=ppt/slides/slide1.xml><?xml version="1.0" encoding="utf-8"?>
 <p:sld xmlns:a="http://schemas.openxmlformats.org/drawingml/2006/main" xmlns:r="http://schemas.openxmlformats.org/officeDocument/2006/relationships" xmlns:p="http://schemas.openxmlformats.org/presentationml/2006/main">
   <p:cSld>
-    <p:bg>
-      <p:bgPr>
-        <a:solidFill>
-          <a:srgbClr val="FFFFFF"/>
-        </a:solidFill>
-        <a:effectLst/>
-      </p:bgPr>
-    </p:bg>
     <p:spTree>
       <p:nvGrpSpPr>
         <p:cNvPr id="1" name=""/>
@@ -871,10 +934,8 @@
       </p:grpSpPr>
       <p:pic>
         <p:nvPicPr>
-          <p:cNvPr id="10" name="图片 9" descr="2bdea198cef4ac19e4d7f0e97a031163"/>
-          <p:cNvPicPr>
-            <a:picLocks noChangeAspect="1"/>
-          </p:cNvPicPr>
+          <p:cNvPr id="42" name="图片 9" descr="2bdea198cef4ac19e4d7f0e97a031163"/>
+          <p:cNvPicPr/>
           <p:nvPr/>
         </p:nvPicPr>
         <p:blipFill>
@@ -885,24 +946,27 @@
         </p:blipFill>
         <p:spPr>
           <a:xfrm>
-            <a:off x="0" y="1137285"/>
-            <a:ext cx="5616575" cy="3650615"/>
+            <a:off x="0" y="1137240"/>
+            <a:ext cx="5616360" cy="3650400"/>
           </a:xfrm>
           <a:prstGeom prst="rect">
             <a:avLst/>
           </a:prstGeom>
+          <a:ln w="0">
+            <a:noFill/>
+          </a:ln>
         </p:spPr>
       </p:pic>
       <p:sp>
         <p:nvSpPr>
-          <p:cNvPr id="4" name="左弧形箭头 3"/>
+          <p:cNvPr id="43" name="左弧形箭头 3"/>
           <p:cNvSpPr/>
           <p:nvPr/>
         </p:nvSpPr>
         <p:spPr>
           <a:xfrm flipH="1">
-            <a:off x="5269230" y="2077085"/>
-            <a:ext cx="461645" cy="1889125"/>
+            <a:off x="5268600" y="2077200"/>
+            <a:ext cx="461160" cy="1888920"/>
           </a:xfrm>
           <a:prstGeom prst="curvedRightArrow">
             <a:avLst>
@@ -918,15 +982,11 @@
               <a:alpha val="65000"/>
             </a:schemeClr>
           </a:solidFill>
-          <a:ln w="28575" cap="sq" cmpd="sng">
+          <a:ln w="28575">
             <a:noFill/>
-            <a:prstDash val="solid"/>
-            <a:round/>
-            <a:headEnd type="none"/>
-            <a:tailEnd type="triangle" w="sm" len="sm"/>
           </a:ln>
           <a:effectLst>
-            <a:outerShdw blurRad="50800" dist="38100" dir="5400000" algn="t" rotWithShape="0">
+            <a:outerShdw blurRad="50760" dist="38160" dir="5400000" algn="t" rotWithShape="0">
               <a:schemeClr val="accent5">
                 <a:lumMod val="75000"/>
                 <a:alpha val="98000"/>
@@ -944,28 +1004,13 @@
           <a:effectRef idx="0">
             <a:srgbClr val="FFFFFF"/>
           </a:effectRef>
-          <a:fontRef idx="minor">
-            <a:schemeClr val="tx1"/>
-          </a:fontRef>
+          <a:fontRef idx="minor"/>
         </p:style>
-        <p:txBody>
-          <a:bodyPr rtlCol="0" anchor="ctr"/>
-          <a:p>
-            <a:pPr algn="ctr"/>
-            <a:endParaRPr lang="zh-CN" altLang="en-US">
-              <a:solidFill>
-                <a:schemeClr val="tx1"/>
-              </a:solidFill>
-            </a:endParaRPr>
-          </a:p>
-        </p:txBody>
       </p:sp>
       <p:pic>
         <p:nvPicPr>
-          <p:cNvPr id="3" name="图片 2" descr="截屏2026-09-02 18.57.51"/>
-          <p:cNvPicPr>
-            <a:picLocks noChangeAspect="1"/>
-          </p:cNvPicPr>
+          <p:cNvPr id="44" name="图片 2" descr="截屏2026-09-02 18.57.51"/>
+          <p:cNvPicPr/>
           <p:nvPr/>
         </p:nvPicPr>
         <p:blipFill>
@@ -976,48 +1021,62 @@
         </p:blipFill>
         <p:spPr>
           <a:xfrm>
-            <a:off x="5201920" y="1878330"/>
-            <a:ext cx="457200" cy="394970"/>
+            <a:off x="5202000" y="1878480"/>
+            <a:ext cx="456840" cy="394560"/>
           </a:xfrm>
           <a:prstGeom prst="rect">
             <a:avLst/>
           </a:prstGeom>
+          <a:ln w="0">
+            <a:noFill/>
+          </a:ln>
         </p:spPr>
       </p:pic>
       <p:sp>
         <p:nvSpPr>
-          <p:cNvPr id="6" name="Shape 3"/>
+          <p:cNvPr id="45" name="Shape 3"/>
           <p:cNvSpPr/>
           <p:nvPr/>
         </p:nvSpPr>
         <p:spPr>
           <a:xfrm>
-            <a:off x="2864040" y="440497"/>
-            <a:ext cx="1270" cy="174625"/>
+            <a:off x="2863800" y="440280"/>
+            <a:ext cx="1440" cy="174600"/>
           </a:xfrm>
           <a:prstGeom prst="line">
             <a:avLst/>
           </a:prstGeom>
-          <a:noFill/>
           <a:ln w="16510">
             <a:solidFill>
               <a:srgbClr val="111111"/>
             </a:solidFill>
-            <a:prstDash val="solid"/>
-            <a:tailEnd type="triangle"/>
-          </a:ln>
-        </p:spPr>
-      </p:sp>
-      <p:sp>
-        <p:nvSpPr>
-          <p:cNvPr id="7" name="Shape 4"/>
+            <a:round/>
+            <a:tailEnd type="triangle" w="med" len="med"/>
+          </a:ln>
+        </p:spPr>
+        <p:style>
+          <a:lnRef idx="0">
+            <a:srgbClr val="FFFFFF"/>
+          </a:lnRef>
+          <a:fillRef idx="0">
+            <a:srgbClr val="FFFFFF"/>
+          </a:fillRef>
+          <a:effectRef idx="0">
+            <a:srgbClr val="FFFFFF"/>
+          </a:effectRef>
+          <a:fontRef idx="minor"/>
+        </p:style>
+      </p:sp>
+      <p:sp>
+        <p:nvSpPr>
+          <p:cNvPr id="46" name="Shape 4"/>
           <p:cNvSpPr/>
           <p:nvPr/>
         </p:nvSpPr>
         <p:spPr>
           <a:xfrm>
-            <a:off x="1872170" y="622107"/>
-            <a:ext cx="1985645" cy="338455"/>
+            <a:off x="1872000" y="622080"/>
+            <a:ext cx="1985400" cy="338040"/>
           </a:xfrm>
           <a:prstGeom prst="roundRect">
             <a:avLst>
@@ -1031,105 +1090,154 @@
             <a:solidFill>
               <a:srgbClr val="5D88B8"/>
             </a:solidFill>
-            <a:prstDash val="solid"/>
-          </a:ln>
-        </p:spPr>
-      </p:sp>
-      <p:sp>
-        <p:nvSpPr>
-          <p:cNvPr id="8" name="Text 5"/>
-          <p:cNvSpPr txBox="1"/>
-          <p:nvPr/>
-        </p:nvSpPr>
-        <p:spPr>
-          <a:xfrm>
-            <a:off x="1954285" y="693981"/>
-            <a:ext cx="1820915" cy="123452"/>
+            <a:round/>
+          </a:ln>
+        </p:spPr>
+        <p:style>
+          <a:lnRef idx="0">
+            <a:srgbClr val="FFFFFF"/>
+          </a:lnRef>
+          <a:fillRef idx="0">
+            <a:srgbClr val="FFFFFF"/>
+          </a:fillRef>
+          <a:effectRef idx="0">
+            <a:srgbClr val="FFFFFF"/>
+          </a:effectRef>
+          <a:fontRef idx="minor"/>
+        </p:style>
+      </p:sp>
+      <p:sp>
+        <p:nvSpPr>
+          <p:cNvPr id="47" name="Text 5"/>
+          <p:cNvSpPr/>
+          <p:nvPr/>
+        </p:nvSpPr>
+        <p:spPr>
+          <a:xfrm>
+            <a:off x="1954440" y="694080"/>
+            <a:ext cx="1820520" cy="123120"/>
           </a:xfrm>
           <a:prstGeom prst="rect">
             <a:avLst/>
           </a:prstGeom>
           <a:noFill/>
-        </p:spPr>
+          <a:ln w="0">
+            <a:noFill/>
+          </a:ln>
+        </p:spPr>
+        <p:style>
+          <a:lnRef idx="0">
+            <a:srgbClr val="FFFFFF"/>
+          </a:lnRef>
+          <a:fillRef idx="0">
+            <a:srgbClr val="FFFFFF"/>
+          </a:fillRef>
+          <a:effectRef idx="0">
+            <a:srgbClr val="FFFFFF"/>
+          </a:effectRef>
+          <a:fontRef idx="minor"/>
+        </p:style>
         <p:txBody>
-          <a:bodyPr wrap="square" lIns="0" tIns="0" rIns="0" bIns="0" rtlCol="0" anchor="ctr"/>
-          <a:lstStyle/>
+          <a:bodyPr lIns="0" tIns="0" rIns="0" bIns="0" anchor="ctr">
+            <a:noAutofit/>
+          </a:bodyPr>
           <a:p>
-            <a:pPr marL="0" indent="0" algn="ctr">
+            <a:pPr algn="ctr">
+              <a:lnSpc>
+                <a:spcPct val="100000"/>
+              </a:lnSpc>
               <a:buNone/>
+              <a:tabLst>
+                <a:tab pos="0" algn="l"/>
+              </a:tabLst>
             </a:pPr>
             <a:r>
-              <a:rPr lang="en-US" sz="800" b="1" dirty="0">
+              <a:rPr lang="en-US" sz="800" b="1" strike="noStrike" spc="-1">
                 <a:solidFill>
                   <a:srgbClr val="164A8A"/>
                 </a:solidFill>
-                <a:latin typeface="Arimo" pitchFamily="34" charset="0"/>
-                <a:ea typeface="Arimo" pitchFamily="34" charset="-122"/>
-                <a:cs typeface="Arimo" pitchFamily="34" charset="-120"/>
+                <a:latin typeface="Arial" panose="020B0604020202020204"/>
+                <a:ea typeface="Arial" panose="020B0604020202020204"/>
               </a:rPr>
               <a:t>Planning Role</a:t>
             </a:r>
-            <a:endParaRPr lang="en-US" sz="800" b="1" dirty="0">
-              <a:solidFill>
-                <a:srgbClr val="164A8A"/>
-              </a:solidFill>
-              <a:latin typeface="Arimo" pitchFamily="34" charset="0"/>
-              <a:ea typeface="Arimo" pitchFamily="34" charset="-122"/>
-              <a:cs typeface="Arimo" pitchFamily="34" charset="-120"/>
+            <a:endParaRPr lang="en-US" sz="800" b="0" strike="noStrike" spc="-1">
+              <a:latin typeface="Arial" panose="020B0604020202020204"/>
             </a:endParaRPr>
           </a:p>
         </p:txBody>
       </p:sp>
       <p:sp>
         <p:nvSpPr>
-          <p:cNvPr id="9" name="Text 6"/>
-          <p:cNvSpPr txBox="1"/>
-          <p:nvPr/>
-        </p:nvSpPr>
-        <p:spPr>
-          <a:xfrm>
-            <a:off x="1943997" y="816798"/>
-            <a:ext cx="1851778" cy="102877"/>
+          <p:cNvPr id="48" name="Text 6"/>
+          <p:cNvSpPr/>
+          <p:nvPr/>
+        </p:nvSpPr>
+        <p:spPr>
+          <a:xfrm>
+            <a:off x="1944000" y="816840"/>
+            <a:ext cx="1851480" cy="102600"/>
           </a:xfrm>
           <a:prstGeom prst="rect">
             <a:avLst/>
           </a:prstGeom>
           <a:noFill/>
-        </p:spPr>
+          <a:ln w="0">
+            <a:noFill/>
+          </a:ln>
+        </p:spPr>
+        <p:style>
+          <a:lnRef idx="0">
+            <a:srgbClr val="FFFFFF"/>
+          </a:lnRef>
+          <a:fillRef idx="0">
+            <a:srgbClr val="FFFFFF"/>
+          </a:fillRef>
+          <a:effectRef idx="0">
+            <a:srgbClr val="FFFFFF"/>
+          </a:effectRef>
+          <a:fontRef idx="minor"/>
+        </p:style>
         <p:txBody>
-          <a:bodyPr wrap="square" lIns="0" tIns="0" rIns="0" bIns="0" rtlCol="0" anchor="ctr">
+          <a:bodyPr lIns="0" tIns="0" rIns="0" bIns="0" anchor="ctr">
             <a:normAutofit/>
           </a:bodyPr>
-          <a:lstStyle/>
           <a:p>
-            <a:pPr marL="0" indent="0" algn="ctr">
+            <a:pPr algn="ctr">
+              <a:lnSpc>
+                <a:spcPct val="100000"/>
+              </a:lnSpc>
               <a:buNone/>
+              <a:tabLst>
+                <a:tab pos="0" algn="l"/>
+              </a:tabLst>
             </a:pPr>
             <a:r>
-              <a:rPr lang="en-US" sz="600" i="1" dirty="0">
+              <a:rPr lang="en-US" sz="600" b="0" i="1" strike="noStrike" spc="-1">
                 <a:solidFill>
                   <a:srgbClr val="111111"/>
                 </a:solidFill>
-                <a:latin typeface="Arimo" pitchFamily="34" charset="0"/>
-                <a:ea typeface="Arimo" pitchFamily="34" charset="-122"/>
-                <a:cs typeface="Arimo" pitchFamily="34" charset="-120"/>
+                <a:latin typeface="Arial" panose="020B0604020202020204"/>
+                <a:ea typeface="Arial" panose="020B0604020202020204"/>
               </a:rPr>
-              <a:t>Plan tasks and assign heterogeneous executors.</a:t>
-            </a:r>
-            <a:endParaRPr lang="en-US" sz="600" dirty="0"/>
+              <a:t>Decompose tasks and assign compatible manipulators.</a:t>
+            </a:r>
+            <a:endParaRPr lang="en-US" sz="600" b="0" strike="noStrike" spc="-1">
+              <a:latin typeface="Arial" panose="020B0604020202020204"/>
+            </a:endParaRPr>
           </a:p>
         </p:txBody>
       </p:sp>
       <p:sp>
         <p:nvSpPr>
-          <p:cNvPr id="11" name="Shape 8"/>
+          <p:cNvPr id="49" name="Shape 8"/>
           <p:cNvSpPr/>
           <p:nvPr/>
         </p:nvSpPr>
         <p:spPr>
           <a:xfrm>
-            <a:off x="235775" y="496377"/>
-            <a:ext cx="1368425" cy="446405"/>
+            <a:off x="235800" y="496440"/>
+            <a:ext cx="1368000" cy="446040"/>
           </a:xfrm>
           <a:prstGeom prst="roundRect">
             <a:avLst>
@@ -1143,129 +1251,178 @@
             <a:solidFill>
               <a:srgbClr val="6A9164"/>
             </a:solidFill>
-            <a:prstDash val="solid"/>
-          </a:ln>
-        </p:spPr>
-      </p:sp>
-      <p:sp>
-        <p:nvSpPr>
-          <p:cNvPr id="12" name="Text 9"/>
-          <p:cNvSpPr txBox="1"/>
-          <p:nvPr/>
-        </p:nvSpPr>
-        <p:spPr>
-          <a:xfrm>
-            <a:off x="323002" y="577550"/>
-            <a:ext cx="1203656" cy="113164"/>
+            <a:round/>
+          </a:ln>
+        </p:spPr>
+        <p:style>
+          <a:lnRef idx="0">
+            <a:srgbClr val="FFFFFF"/>
+          </a:lnRef>
+          <a:fillRef idx="0">
+            <a:srgbClr val="FFFFFF"/>
+          </a:fillRef>
+          <a:effectRef idx="0">
+            <a:srgbClr val="FFFFFF"/>
+          </a:effectRef>
+          <a:fontRef idx="minor"/>
+        </p:style>
+      </p:sp>
+      <p:sp>
+        <p:nvSpPr>
+          <p:cNvPr id="50" name="Text 9"/>
+          <p:cNvSpPr/>
+          <p:nvPr/>
+        </p:nvSpPr>
+        <p:spPr>
+          <a:xfrm>
+            <a:off x="322920" y="577440"/>
+            <a:ext cx="1203120" cy="112680"/>
           </a:xfrm>
           <a:prstGeom prst="rect">
             <a:avLst/>
           </a:prstGeom>
           <a:noFill/>
-        </p:spPr>
+          <a:ln w="0">
+            <a:noFill/>
+          </a:ln>
+        </p:spPr>
+        <p:style>
+          <a:lnRef idx="0">
+            <a:srgbClr val="FFFFFF"/>
+          </a:lnRef>
+          <a:fillRef idx="0">
+            <a:srgbClr val="FFFFFF"/>
+          </a:fillRef>
+          <a:effectRef idx="0">
+            <a:srgbClr val="FFFFFF"/>
+          </a:effectRef>
+          <a:fontRef idx="minor"/>
+        </p:style>
         <p:txBody>
-          <a:bodyPr wrap="square" lIns="0" tIns="0" rIns="0" bIns="0" rtlCol="0" anchor="ctr"/>
-          <a:lstStyle/>
+          <a:bodyPr lIns="0" tIns="0" rIns="0" bIns="0" anchor="ctr">
+            <a:noAutofit/>
+          </a:bodyPr>
           <a:p>
-            <a:pPr marL="0" indent="0" algn="ctr">
+            <a:pPr algn="ctr">
+              <a:lnSpc>
+                <a:spcPct val="100000"/>
+              </a:lnSpc>
               <a:buNone/>
+              <a:tabLst>
+                <a:tab pos="0" algn="l"/>
+              </a:tabLst>
             </a:pPr>
             <a:r>
-              <a:rPr lang="en-US" sz="800" b="1" dirty="0">
+              <a:rPr lang="en-US" sz="800" b="1" strike="noStrike" spc="-1">
                 <a:solidFill>
                   <a:srgbClr val="286E29"/>
                 </a:solidFill>
-                <a:latin typeface="Arimo" pitchFamily="34" charset="0"/>
-                <a:ea typeface="Arimo" pitchFamily="34" charset="-122"/>
-                <a:cs typeface="Arimo" pitchFamily="34" charset="-120"/>
+                <a:latin typeface="Arial" panose="020B0604020202020204"/>
+                <a:ea typeface="Arial" panose="020B0604020202020204"/>
               </a:rPr>
               <a:t>Affordance Role</a:t>
             </a:r>
-            <a:endParaRPr lang="en-US" sz="800" b="1" dirty="0">
-              <a:solidFill>
-                <a:srgbClr val="286E29"/>
-              </a:solidFill>
-              <a:latin typeface="Arimo" pitchFamily="34" charset="0"/>
-              <a:ea typeface="Arimo" pitchFamily="34" charset="-122"/>
-              <a:cs typeface="Arimo" pitchFamily="34" charset="-120"/>
+            <a:endParaRPr lang="en-US" sz="800" b="0" strike="noStrike" spc="-1">
+              <a:latin typeface="Arial" panose="020B0604020202020204"/>
             </a:endParaRPr>
           </a:p>
         </p:txBody>
       </p:sp>
       <p:sp>
         <p:nvSpPr>
-          <p:cNvPr id="13" name="Text 10"/>
-          <p:cNvSpPr txBox="1"/>
-          <p:nvPr/>
-        </p:nvSpPr>
-        <p:spPr>
-          <a:xfrm>
-            <a:off x="312779" y="721386"/>
-            <a:ext cx="1213943" cy="180034"/>
+          <p:cNvPr id="51" name="Text 10"/>
+          <p:cNvSpPr/>
+          <p:nvPr/>
+        </p:nvSpPr>
+        <p:spPr>
+          <a:xfrm>
+            <a:off x="312840" y="721440"/>
+            <a:ext cx="1213560" cy="179640"/>
           </a:xfrm>
           <a:prstGeom prst="rect">
             <a:avLst/>
           </a:prstGeom>
           <a:noFill/>
-        </p:spPr>
+          <a:ln w="0">
+            <a:noFill/>
+          </a:ln>
+        </p:spPr>
+        <p:style>
+          <a:lnRef idx="0">
+            <a:srgbClr val="FFFFFF"/>
+          </a:lnRef>
+          <a:fillRef idx="0">
+            <a:srgbClr val="FFFFFF"/>
+          </a:fillRef>
+          <a:effectRef idx="0">
+            <a:srgbClr val="FFFFFF"/>
+          </a:effectRef>
+          <a:fontRef idx="minor"/>
+        </p:style>
         <p:txBody>
-          <a:bodyPr wrap="square" lIns="0" tIns="0" rIns="0" bIns="0" rtlCol="0" anchor="ctr">
+          <a:bodyPr lIns="0" tIns="0" rIns="0" bIns="0" anchor="ctr">
             <a:noAutofit/>
           </a:bodyPr>
-          <a:lstStyle/>
           <a:p>
-            <a:pPr marL="0" indent="0" algn="ctr">
+            <a:pPr algn="ctr">
+              <a:lnSpc>
+                <a:spcPct val="100000"/>
+              </a:lnSpc>
               <a:buNone/>
+              <a:tabLst>
+                <a:tab pos="0" algn="l"/>
+              </a:tabLst>
             </a:pPr>
             <a:r>
-              <a:rPr lang="en-US" sz="600" i="1" dirty="0">
+              <a:rPr lang="en-US" sz="600" b="0" i="1" strike="noStrike" spc="-1">
                 <a:solidFill>
                   <a:srgbClr val="111111"/>
                 </a:solidFill>
-                <a:latin typeface="Arimo" pitchFamily="34" charset="0"/>
-                <a:ea typeface="Arimo" pitchFamily="34" charset="-122"/>
-                <a:cs typeface="Arimo" pitchFamily="34" charset="-120"/>
+                <a:latin typeface="Arial" panose="020B0604020202020204"/>
+                <a:ea typeface="Arial" panose="020B0604020202020204"/>
               </a:rPr>
               <a:t>Interpret objects, relations,</a:t>
             </a:r>
-            <a:endParaRPr lang="en-US" sz="600" dirty="0"/>
+            <a:endParaRPr lang="en-US" sz="600" b="0" strike="noStrike" spc="-1">
+              <a:latin typeface="Arial" panose="020B0604020202020204"/>
+            </a:endParaRPr>
           </a:p>
           <a:p>
-            <a:pPr marL="0" indent="0" algn="ctr">
+            <a:pPr algn="ctr">
+              <a:lnSpc>
+                <a:spcPct val="100000"/>
+              </a:lnSpc>
               <a:buNone/>
+              <a:tabLst>
+                <a:tab pos="0" algn="l"/>
+              </a:tabLst>
             </a:pPr>
             <a:r>
-              <a:rPr lang="en-US" sz="600" i="1" dirty="0">
+              <a:rPr lang="en-US" sz="600" b="0" i="1" strike="noStrike" spc="-1">
                 <a:solidFill>
                   <a:srgbClr val="111111"/>
                 </a:solidFill>
-                <a:latin typeface="Arimo" pitchFamily="34" charset="0"/>
-                <a:ea typeface="Arimo" pitchFamily="34" charset="-122"/>
-                <a:cs typeface="Arimo" pitchFamily="34" charset="-120"/>
+                <a:latin typeface="Arial" panose="020B0604020202020204"/>
+                <a:ea typeface="Arial" panose="020B0604020202020204"/>
               </a:rPr>
-              <a:t>and affordances.</a:t>
-            </a:r>
-            <a:endParaRPr lang="en-US" sz="600" i="1" dirty="0">
-              <a:solidFill>
-                <a:srgbClr val="111111"/>
-              </a:solidFill>
-              <a:latin typeface="Arimo" pitchFamily="34" charset="0"/>
-              <a:ea typeface="Arimo" pitchFamily="34" charset="-122"/>
-              <a:cs typeface="Arimo" pitchFamily="34" charset="-120"/>
+              <a:t>and feasibility facts.</a:t>
+            </a:r>
+            <a:endParaRPr lang="en-US" sz="600" b="0" strike="noStrike" spc="-1">
+              <a:latin typeface="Arial" panose="020B0604020202020204"/>
             </a:endParaRPr>
           </a:p>
         </p:txBody>
       </p:sp>
       <p:sp>
         <p:nvSpPr>
-          <p:cNvPr id="14" name="Shape 11"/>
+          <p:cNvPr id="52" name="Shape 11"/>
           <p:cNvSpPr/>
           <p:nvPr/>
         </p:nvSpPr>
         <p:spPr>
           <a:xfrm>
-            <a:off x="2098230" y="1330767"/>
-            <a:ext cx="1532890" cy="375920"/>
+            <a:off x="2098080" y="1330920"/>
+            <a:ext cx="1532520" cy="375480"/>
           </a:xfrm>
           <a:prstGeom prst="roundRect">
             <a:avLst>
@@ -1279,107 +1436,154 @@
             <a:solidFill>
               <a:srgbClr val="7763A8"/>
             </a:solidFill>
-            <a:prstDash val="solid"/>
-          </a:ln>
-        </p:spPr>
-      </p:sp>
-      <p:sp>
-        <p:nvSpPr>
-          <p:cNvPr id="15" name="Text 12"/>
-          <p:cNvSpPr txBox="1"/>
-          <p:nvPr/>
-        </p:nvSpPr>
-        <p:spPr>
-          <a:xfrm>
-            <a:off x="2175469" y="1418102"/>
-            <a:ext cx="1378546" cy="118308"/>
+            <a:round/>
+          </a:ln>
+        </p:spPr>
+        <p:style>
+          <a:lnRef idx="0">
+            <a:srgbClr val="FFFFFF"/>
+          </a:lnRef>
+          <a:fillRef idx="0">
+            <a:srgbClr val="FFFFFF"/>
+          </a:fillRef>
+          <a:effectRef idx="0">
+            <a:srgbClr val="FFFFFF"/>
+          </a:effectRef>
+          <a:fontRef idx="minor"/>
+        </p:style>
+      </p:sp>
+      <p:sp>
+        <p:nvSpPr>
+          <p:cNvPr id="53" name="Text 12"/>
+          <p:cNvSpPr/>
+          <p:nvPr/>
+        </p:nvSpPr>
+        <p:spPr>
+          <a:xfrm>
+            <a:off x="2175480" y="1418040"/>
+            <a:ext cx="1378080" cy="118080"/>
           </a:xfrm>
           <a:prstGeom prst="rect">
             <a:avLst/>
           </a:prstGeom>
           <a:noFill/>
-        </p:spPr>
+          <a:ln w="0">
+            <a:noFill/>
+          </a:ln>
+        </p:spPr>
+        <p:style>
+          <a:lnRef idx="0">
+            <a:srgbClr val="FFFFFF"/>
+          </a:lnRef>
+          <a:fillRef idx="0">
+            <a:srgbClr val="FFFFFF"/>
+          </a:fillRef>
+          <a:effectRef idx="0">
+            <a:srgbClr val="FFFFFF"/>
+          </a:effectRef>
+          <a:fontRef idx="minor"/>
+        </p:style>
         <p:txBody>
-          <a:bodyPr wrap="square" lIns="0" tIns="0" rIns="0" bIns="0" rtlCol="0" anchor="ctr">
-            <a:normAutofit fontScale="90000"/>
+          <a:bodyPr lIns="0" tIns="0" rIns="0" bIns="0" anchor="ctr">
+            <a:normAutofit/>
           </a:bodyPr>
-          <a:lstStyle/>
           <a:p>
-            <a:pPr marL="0" indent="0" algn="ctr">
+            <a:pPr algn="ctr">
+              <a:lnSpc>
+                <a:spcPct val="100000"/>
+              </a:lnSpc>
               <a:buNone/>
+              <a:tabLst>
+                <a:tab pos="0" algn="l"/>
+              </a:tabLst>
             </a:pPr>
             <a:r>
-              <a:rPr lang="en-US" sz="725" b="1" dirty="0">
+              <a:rPr lang="en-US" sz="730" b="1" strike="noStrike" spc="-1">
                 <a:solidFill>
                   <a:srgbClr val="5A2B89"/>
                 </a:solidFill>
-                <a:latin typeface="Arimo" pitchFamily="34" charset="0"/>
-                <a:ea typeface="Arimo" pitchFamily="34" charset="-122"/>
-                <a:cs typeface="Arimo" pitchFamily="34" charset="-120"/>
+                <a:latin typeface="Arial" panose="020B0604020202020204"/>
+                <a:ea typeface="Arial" panose="020B0604020202020204"/>
               </a:rPr>
               <a:t>Shared Semantic State</a:t>
             </a:r>
-            <a:endParaRPr lang="en-US" sz="725" dirty="0"/>
+            <a:endParaRPr lang="en-US" sz="730" b="0" strike="noStrike" spc="-1">
+              <a:latin typeface="Arial" panose="020B0604020202020204"/>
+            </a:endParaRPr>
           </a:p>
         </p:txBody>
       </p:sp>
       <p:sp>
         <p:nvSpPr>
-          <p:cNvPr id="16" name="Text 13"/>
-          <p:cNvSpPr txBox="1"/>
-          <p:nvPr/>
-        </p:nvSpPr>
-        <p:spPr>
-          <a:xfrm>
-            <a:off x="2165182" y="1536410"/>
-            <a:ext cx="1399121" cy="97733"/>
+          <p:cNvPr id="54" name="Text 13"/>
+          <p:cNvSpPr/>
+          <p:nvPr/>
+        </p:nvSpPr>
+        <p:spPr>
+          <a:xfrm>
+            <a:off x="2165040" y="1536480"/>
+            <a:ext cx="1398600" cy="97200"/>
           </a:xfrm>
           <a:prstGeom prst="rect">
             <a:avLst/>
           </a:prstGeom>
           <a:noFill/>
-        </p:spPr>
+          <a:ln w="0">
+            <a:noFill/>
+          </a:ln>
+        </p:spPr>
+        <p:style>
+          <a:lnRef idx="0">
+            <a:srgbClr val="FFFFFF"/>
+          </a:lnRef>
+          <a:fillRef idx="0">
+            <a:srgbClr val="FFFFFF"/>
+          </a:fillRef>
+          <a:effectRef idx="0">
+            <a:srgbClr val="FFFFFF"/>
+          </a:effectRef>
+          <a:fontRef idx="minor"/>
+        </p:style>
         <p:txBody>
-          <a:bodyPr wrap="square" lIns="0" tIns="0" rIns="0" bIns="0" rtlCol="0" anchor="ctr">
+          <a:bodyPr lIns="0" tIns="0" rIns="0" bIns="0" anchor="ctr">
             <a:noAutofit/>
           </a:bodyPr>
-          <a:lstStyle/>
           <a:p>
-            <a:pPr marL="0" indent="0" algn="ctr">
+            <a:pPr algn="ctr">
+              <a:lnSpc>
+                <a:spcPct val="100000"/>
+              </a:lnSpc>
               <a:buNone/>
+              <a:tabLst>
+                <a:tab pos="0" algn="l"/>
+              </a:tabLst>
             </a:pPr>
             <a:r>
-              <a:rPr lang="en-US" sz="600" i="1" dirty="0">
+              <a:rPr lang="en-US" sz="600" b="0" i="1" strike="noStrike" spc="-1">
                 <a:solidFill>
                   <a:srgbClr val="111111"/>
                 </a:solidFill>
-                <a:latin typeface="Arimo" pitchFamily="34" charset="0"/>
-                <a:ea typeface="Arimo" pitchFamily="34" charset="-122"/>
-                <a:cs typeface="Arimo" pitchFamily="34" charset="-120"/>
+                <a:latin typeface="Arial" panose="020B0604020202020204"/>
+                <a:ea typeface="Arial" panose="020B0604020202020204"/>
               </a:rPr>
               <a:t>shared task and scene understanding</a:t>
             </a:r>
-            <a:endParaRPr lang="en-US" sz="600" i="1" dirty="0">
-              <a:solidFill>
-                <a:srgbClr val="111111"/>
-              </a:solidFill>
-              <a:latin typeface="Arimo" pitchFamily="34" charset="0"/>
-              <a:ea typeface="Arimo" pitchFamily="34" charset="-122"/>
-              <a:cs typeface="Arimo" pitchFamily="34" charset="-120"/>
+            <a:endParaRPr lang="en-US" sz="600" b="0" strike="noStrike" spc="-1">
+              <a:latin typeface="Arial" panose="020B0604020202020204"/>
             </a:endParaRPr>
           </a:p>
         </p:txBody>
       </p:sp>
       <p:sp>
         <p:nvSpPr>
-          <p:cNvPr id="17" name="Shape 14"/>
+          <p:cNvPr id="55" name="Shape 14"/>
           <p:cNvSpPr/>
           <p:nvPr/>
         </p:nvSpPr>
         <p:spPr>
           <a:xfrm>
-            <a:off x="4191825" y="499552"/>
-            <a:ext cx="1347470" cy="461645"/>
+            <a:off x="4191840" y="499680"/>
+            <a:ext cx="1347120" cy="461160"/>
           </a:xfrm>
           <a:prstGeom prst="roundRect">
             <a:avLst>
@@ -1393,146 +1597,213 @@
             <a:solidFill>
               <a:srgbClr val="D08A1D"/>
             </a:solidFill>
-            <a:prstDash val="solid"/>
-          </a:ln>
-        </p:spPr>
-      </p:sp>
-      <p:sp>
-        <p:nvSpPr>
-          <p:cNvPr id="18" name="Text 15"/>
-          <p:cNvSpPr txBox="1"/>
-          <p:nvPr/>
-        </p:nvSpPr>
-        <p:spPr>
-          <a:xfrm>
-            <a:off x="4274329" y="585170"/>
-            <a:ext cx="1213943" cy="113164"/>
+            <a:round/>
+          </a:ln>
+        </p:spPr>
+        <p:style>
+          <a:lnRef idx="0">
+            <a:srgbClr val="FFFFFF"/>
+          </a:lnRef>
+          <a:fillRef idx="0">
+            <a:srgbClr val="FFFFFF"/>
+          </a:fillRef>
+          <a:effectRef idx="0">
+            <a:srgbClr val="FFFFFF"/>
+          </a:effectRef>
+          <a:fontRef idx="minor"/>
+        </p:style>
+      </p:sp>
+      <p:sp>
+        <p:nvSpPr>
+          <p:cNvPr id="56" name="Text 15"/>
+          <p:cNvSpPr/>
+          <p:nvPr/>
+        </p:nvSpPr>
+        <p:spPr>
+          <a:xfrm>
+            <a:off x="4274280" y="585000"/>
+            <a:ext cx="1213560" cy="112680"/>
           </a:xfrm>
           <a:prstGeom prst="rect">
             <a:avLst/>
           </a:prstGeom>
           <a:noFill/>
-        </p:spPr>
+          <a:ln w="0">
+            <a:noFill/>
+          </a:ln>
+        </p:spPr>
+        <p:style>
+          <a:lnRef idx="0">
+            <a:srgbClr val="FFFFFF"/>
+          </a:lnRef>
+          <a:fillRef idx="0">
+            <a:srgbClr val="FFFFFF"/>
+          </a:fillRef>
+          <a:effectRef idx="0">
+            <a:srgbClr val="FFFFFF"/>
+          </a:effectRef>
+          <a:fontRef idx="minor"/>
+        </p:style>
         <p:txBody>
-          <a:bodyPr wrap="square" lIns="0" tIns="0" rIns="0" bIns="0" rtlCol="0" anchor="ctr"/>
-          <a:lstStyle/>
+          <a:bodyPr lIns="0" tIns="0" rIns="0" bIns="0" anchor="ctr">
+            <a:noAutofit/>
+          </a:bodyPr>
           <a:p>
-            <a:pPr marL="0" indent="0" algn="ctr">
+            <a:pPr algn="ctr">
+              <a:lnSpc>
+                <a:spcPct val="100000"/>
+              </a:lnSpc>
               <a:buNone/>
+              <a:tabLst>
+                <a:tab pos="0" algn="l"/>
+              </a:tabLst>
             </a:pPr>
             <a:r>
-              <a:rPr lang="en-US" sz="800" b="1" dirty="0">
+              <a:rPr lang="en-US" sz="800" b="1" strike="noStrike" spc="-1">
                 <a:solidFill>
                   <a:srgbClr val="9A5A00"/>
                 </a:solidFill>
-                <a:latin typeface="Arimo" pitchFamily="34" charset="0"/>
-                <a:ea typeface="Arimo" pitchFamily="34" charset="-122"/>
-                <a:cs typeface="Arimo" pitchFamily="34" charset="-120"/>
+                <a:latin typeface="Arial" panose="020B0604020202020204"/>
+                <a:ea typeface="Arial" panose="020B0604020202020204"/>
               </a:rPr>
               <a:t>Verification Role</a:t>
             </a:r>
-            <a:endParaRPr lang="en-US" sz="800" b="1" dirty="0">
-              <a:solidFill>
-                <a:srgbClr val="9A5A00"/>
-              </a:solidFill>
-              <a:latin typeface="Arimo" pitchFamily="34" charset="0"/>
-              <a:ea typeface="Arimo" pitchFamily="34" charset="-122"/>
-              <a:cs typeface="Arimo" pitchFamily="34" charset="-120"/>
+            <a:endParaRPr lang="en-US" sz="800" b="0" strike="noStrike" spc="-1">
+              <a:latin typeface="Arial" panose="020B0604020202020204"/>
             </a:endParaRPr>
           </a:p>
         </p:txBody>
       </p:sp>
       <p:sp>
         <p:nvSpPr>
-          <p:cNvPr id="19" name="Text 16"/>
-          <p:cNvSpPr txBox="1"/>
-          <p:nvPr/>
-        </p:nvSpPr>
-        <p:spPr>
-          <a:xfrm>
-            <a:off x="4284617" y="739801"/>
-            <a:ext cx="1193368" cy="180034"/>
+          <p:cNvPr id="57" name="Text 16"/>
+          <p:cNvSpPr/>
+          <p:nvPr/>
+        </p:nvSpPr>
+        <p:spPr>
+          <a:xfrm>
+            <a:off x="4284720" y="739800"/>
+            <a:ext cx="1193040" cy="179640"/>
           </a:xfrm>
           <a:prstGeom prst="rect">
             <a:avLst/>
           </a:prstGeom>
           <a:noFill/>
-        </p:spPr>
+          <a:ln w="0">
+            <a:noFill/>
+          </a:ln>
+        </p:spPr>
+        <p:style>
+          <a:lnRef idx="0">
+            <a:srgbClr val="FFFFFF"/>
+          </a:lnRef>
+          <a:fillRef idx="0">
+            <a:srgbClr val="FFFFFF"/>
+          </a:fillRef>
+          <a:effectRef idx="0">
+            <a:srgbClr val="FFFFFF"/>
+          </a:effectRef>
+          <a:fontRef idx="minor"/>
+        </p:style>
         <p:txBody>
-          <a:bodyPr wrap="square" lIns="0" tIns="0" rIns="0" bIns="0" rtlCol="0" anchor="ctr">
-            <a:normAutofit lnSpcReduction="10000"/>
+          <a:bodyPr lIns="0" tIns="0" rIns="0" bIns="0" anchor="ctr">
+            <a:normAutofit/>
           </a:bodyPr>
-          <a:lstStyle/>
           <a:p>
-            <a:pPr marL="0" indent="0" algn="ctr">
+            <a:pPr algn="ctr">
+              <a:lnSpc>
+                <a:spcPct val="100000"/>
+              </a:lnSpc>
               <a:buNone/>
+              <a:tabLst>
+                <a:tab pos="0" algn="l"/>
+              </a:tabLst>
             </a:pPr>
             <a:r>
-              <a:rPr lang="en-US" sz="585" i="1" dirty="0">
+              <a:rPr lang="en-US" sz="580" b="0" i="1" strike="noStrike" spc="-1">
                 <a:solidFill>
                   <a:srgbClr val="111111"/>
                 </a:solidFill>
-                <a:latin typeface="Arimo" pitchFamily="34" charset="0"/>
-                <a:ea typeface="Arimo" pitchFamily="34" charset="-122"/>
-                <a:cs typeface="Arimo" pitchFamily="34" charset="-120"/>
+                <a:latin typeface="Arial" panose="020B0604020202020204"/>
+                <a:ea typeface="Arial" panose="020B0604020202020204"/>
               </a:rPr>
-              <a:t>Interpret execution evidence</a:t>
-            </a:r>
-            <a:endParaRPr lang="en-US" sz="585" dirty="0"/>
+              <a:t>Verify intended effects</a:t>
+            </a:r>
+            <a:endParaRPr lang="en-US" sz="580" b="0" strike="noStrike" spc="-1">
+              <a:latin typeface="Arial" panose="020B0604020202020204"/>
+            </a:endParaRPr>
           </a:p>
           <a:p>
-            <a:pPr marL="0" indent="0" algn="ctr">
+            <a:pPr algn="ctr">
+              <a:lnSpc>
+                <a:spcPct val="100000"/>
+              </a:lnSpc>
               <a:buNone/>
+              <a:tabLst>
+                <a:tab pos="0" algn="l"/>
+              </a:tabLst>
             </a:pPr>
             <a:r>
-              <a:rPr lang="en-US" sz="585" i="1" dirty="0">
+              <a:rPr lang="en-US" sz="580" b="0" i="1" strike="noStrike" spc="-1">
                 <a:solidFill>
                   <a:srgbClr val="111111"/>
                 </a:solidFill>
-                <a:latin typeface="Arimo" pitchFamily="34" charset="0"/>
-                <a:ea typeface="Arimo" pitchFamily="34" charset="-122"/>
-                <a:cs typeface="Arimo" pitchFamily="34" charset="-120"/>
+                <a:latin typeface="Arial" panose="020B0604020202020204"/>
+                <a:ea typeface="Arial" panose="020B0604020202020204"/>
               </a:rPr>
               <a:t>and task progress.</a:t>
             </a:r>
-            <a:endParaRPr lang="en-US" sz="585" dirty="0"/>
+            <a:endParaRPr lang="en-US" sz="580" b="0" strike="noStrike" spc="-1">
+              <a:latin typeface="Arial" panose="020B0604020202020204"/>
+            </a:endParaRPr>
           </a:p>
         </p:txBody>
       </p:sp>
       <p:sp>
         <p:nvSpPr>
-          <p:cNvPr id="22" name="Shape 19"/>
+          <p:cNvPr id="58" name="Shape 19"/>
           <p:cNvSpPr/>
           <p:nvPr/>
         </p:nvSpPr>
         <p:spPr>
           <a:xfrm>
-            <a:off x="2864742" y="1711300"/>
-            <a:ext cx="0" cy="200609"/>
+            <a:off x="2864520" y="1711080"/>
+            <a:ext cx="360" cy="200520"/>
           </a:xfrm>
           <a:prstGeom prst="line">
             <a:avLst/>
           </a:prstGeom>
-          <a:noFill/>
           <a:ln w="15875">
             <a:solidFill>
               <a:srgbClr val="111111"/>
             </a:solidFill>
-            <a:prstDash val="solid"/>
-            <a:tailEnd type="triangle"/>
-          </a:ln>
-        </p:spPr>
-      </p:sp>
-      <p:sp>
-        <p:nvSpPr>
-          <p:cNvPr id="23" name="Shape 20"/>
+            <a:round/>
+            <a:tailEnd type="triangle" w="med" len="med"/>
+          </a:ln>
+        </p:spPr>
+        <p:style>
+          <a:lnRef idx="0">
+            <a:srgbClr val="FFFFFF"/>
+          </a:lnRef>
+          <a:fillRef idx="0">
+            <a:srgbClr val="FFFFFF"/>
+          </a:fillRef>
+          <a:effectRef idx="0">
+            <a:srgbClr val="FFFFFF"/>
+          </a:effectRef>
+          <a:fontRef idx="minor"/>
+        </p:style>
+      </p:sp>
+      <p:sp>
+        <p:nvSpPr>
+          <p:cNvPr id="59" name="Shape 20"/>
           <p:cNvSpPr/>
           <p:nvPr/>
         </p:nvSpPr>
         <p:spPr>
           <a:xfrm>
-            <a:off x="2252627" y="1917053"/>
-            <a:ext cx="1213943" cy="298342"/>
+            <a:off x="2252520" y="1917000"/>
+            <a:ext cx="1213560" cy="298080"/>
           </a:xfrm>
           <a:prstGeom prst="roundRect">
             <a:avLst>
@@ -1546,130 +1817,176 @@
             <a:solidFill>
               <a:srgbClr val="91989F"/>
             </a:solidFill>
-            <a:prstDash val="solid"/>
-          </a:ln>
-        </p:spPr>
-      </p:sp>
-      <p:sp>
-        <p:nvSpPr>
-          <p:cNvPr id="24" name="Text 21"/>
-          <p:cNvSpPr txBox="1"/>
-          <p:nvPr/>
-        </p:nvSpPr>
-        <p:spPr>
-          <a:xfrm>
-            <a:off x="2319496" y="1953060"/>
-            <a:ext cx="1080204" cy="118308"/>
+            <a:round/>
+          </a:ln>
+        </p:spPr>
+        <p:style>
+          <a:lnRef idx="0">
+            <a:srgbClr val="FFFFFF"/>
+          </a:lnRef>
+          <a:fillRef idx="0">
+            <a:srgbClr val="FFFFFF"/>
+          </a:fillRef>
+          <a:effectRef idx="0">
+            <a:srgbClr val="FFFFFF"/>
+          </a:effectRef>
+          <a:fontRef idx="minor"/>
+        </p:style>
+      </p:sp>
+      <p:sp>
+        <p:nvSpPr>
+          <p:cNvPr id="60" name="Text 21"/>
+          <p:cNvSpPr/>
+          <p:nvPr/>
+        </p:nvSpPr>
+        <p:spPr>
+          <a:xfrm>
+            <a:off x="2319480" y="1953000"/>
+            <a:ext cx="1080000" cy="118080"/>
           </a:xfrm>
           <a:prstGeom prst="rect">
             <a:avLst/>
           </a:prstGeom>
           <a:noFill/>
-        </p:spPr>
+          <a:ln w="0">
+            <a:noFill/>
+          </a:ln>
+        </p:spPr>
+        <p:style>
+          <a:lnRef idx="0">
+            <a:srgbClr val="FFFFFF"/>
+          </a:lnRef>
+          <a:fillRef idx="0">
+            <a:srgbClr val="FFFFFF"/>
+          </a:fillRef>
+          <a:effectRef idx="0">
+            <a:srgbClr val="FFFFFF"/>
+          </a:effectRef>
+          <a:fontRef idx="minor"/>
+        </p:style>
         <p:txBody>
-          <a:bodyPr wrap="square" lIns="0" tIns="0" rIns="0" bIns="0" rtlCol="0" anchor="ctr">
+          <a:bodyPr lIns="0" tIns="0" rIns="0" bIns="0" anchor="ctr">
             <a:normAutofit/>
           </a:bodyPr>
-          <a:lstStyle/>
           <a:p>
-            <a:pPr marL="0" indent="0" algn="ctr">
+            <a:pPr algn="ctr">
+              <a:lnSpc>
+                <a:spcPct val="100000"/>
+              </a:lnSpc>
               <a:buNone/>
+              <a:tabLst>
+                <a:tab pos="0" algn="l"/>
+              </a:tabLst>
             </a:pPr>
             <a:r>
-              <a:rPr lang="en-US" sz="700" b="1" dirty="0">
+              <a:rPr lang="en-US" sz="700" b="1" strike="noStrike" spc="-1">
                 <a:solidFill>
                   <a:srgbClr val="111111"/>
                 </a:solidFill>
-                <a:latin typeface="Arimo" pitchFamily="34" charset="0"/>
-                <a:ea typeface="Arimo" pitchFamily="34" charset="-122"/>
-                <a:cs typeface="Arimo" pitchFamily="34" charset="-120"/>
+                <a:latin typeface="Arial" panose="020B0604020202020204"/>
+                <a:ea typeface="Arial" panose="020B0604020202020204"/>
               </a:rPr>
-              <a:t>Execution directive</a:t>
-            </a:r>
-            <a:endParaRPr lang="en-US" sz="700" dirty="0"/>
+              <a:t>Primitive command</a:t>
+            </a:r>
+            <a:endParaRPr lang="en-US" sz="700" b="0" strike="noStrike" spc="-1">
+              <a:latin typeface="Arial" panose="020B0604020202020204"/>
+            </a:endParaRPr>
           </a:p>
         </p:txBody>
       </p:sp>
       <p:sp>
         <p:nvSpPr>
-          <p:cNvPr id="25" name="Text 22"/>
-          <p:cNvSpPr txBox="1"/>
-          <p:nvPr/>
-        </p:nvSpPr>
-        <p:spPr>
-          <a:xfrm>
-            <a:off x="2345216" y="2076512"/>
-            <a:ext cx="1028765" cy="87445"/>
+          <p:cNvPr id="61" name="Text 22"/>
+          <p:cNvSpPr/>
+          <p:nvPr/>
+        </p:nvSpPr>
+        <p:spPr>
+          <a:xfrm>
+            <a:off x="2345040" y="2077115"/>
+            <a:ext cx="1028520" cy="87120"/>
           </a:xfrm>
           <a:prstGeom prst="rect">
             <a:avLst/>
           </a:prstGeom>
           <a:noFill/>
-        </p:spPr>
+          <a:ln w="0">
+            <a:noFill/>
+          </a:ln>
+        </p:spPr>
+        <p:style>
+          <a:lnRef idx="0">
+            <a:srgbClr val="FFFFFF"/>
+          </a:lnRef>
+          <a:fillRef idx="0">
+            <a:srgbClr val="FFFFFF"/>
+          </a:fillRef>
+          <a:effectRef idx="0">
+            <a:srgbClr val="FFFFFF"/>
+          </a:effectRef>
+          <a:fontRef idx="minor"/>
+        </p:style>
         <p:txBody>
-          <a:bodyPr wrap="square" lIns="0" tIns="0" rIns="0" bIns="0" rtlCol="0" anchor="ctr">
+          <a:bodyPr lIns="0" tIns="0" rIns="0" bIns="0" anchor="ctr">
             <a:noAutofit/>
           </a:bodyPr>
-          <a:lstStyle/>
           <a:p>
-            <a:pPr marL="0" indent="0" algn="ctr">
+            <a:pPr algn="ctr">
+              <a:lnSpc>
+                <a:spcPct val="100000"/>
+              </a:lnSpc>
               <a:buNone/>
+              <a:tabLst>
+                <a:tab pos="0" algn="l"/>
+              </a:tabLst>
             </a:pPr>
             <a:r>
-              <a:rPr lang="en-US" sz="600" i="1" dirty="0">
+              <a:rPr lang="en-US" sz="600" i="1" spc="-1">
                 <a:solidFill>
                   <a:srgbClr val="111111"/>
                 </a:solidFill>
-                <a:latin typeface="Arimo" pitchFamily="34" charset="0"/>
-                <a:ea typeface="Arimo" pitchFamily="34" charset="-122"/>
-                <a:cs typeface="Arimo" pitchFamily="34" charset="-120"/>
+                <a:latin typeface="Arial" panose="020B0604020202020204"/>
+                <a:ea typeface="Arial" panose="020B0604020202020204"/>
+                <a:sym typeface="+mn-ea"/>
               </a:rPr>
-              <a:t>Robot Arm </a:t>
-            </a:r>
-            <a:r>
-              <a:rPr lang="en-US" sz="600" i="1" dirty="0">
+              <a:t>manipulator</a:t>
+            </a:r>
+            <a:r>
+              <a:rPr lang="en-US" sz="600" b="0" i="1" strike="noStrike" spc="-1">
                 <a:solidFill>
                   <a:srgbClr val="111111"/>
                 </a:solidFill>
-                <a:latin typeface="Arimo" pitchFamily="34" charset="0"/>
-                <a:ea typeface="Arimo" pitchFamily="34" charset="-122"/>
-                <a:cs typeface="Arimo" pitchFamily="34" charset="-120"/>
-                <a:sym typeface="+mn-ea"/>
+                <a:latin typeface="Arial" panose="020B0604020202020204"/>
+                <a:ea typeface="Arial" panose="020B0604020202020204"/>
               </a:rPr>
-              <a:t>· </a:t>
-            </a:r>
-            <a:r>
-              <a:rPr lang="en-US" sz="600" i="1" dirty="0">
+              <a:t> · target · </a:t>
+            </a:r>
+            <a:r>
+              <a:rPr lang="en-US" sz="600" i="1" spc="-1">
                 <a:solidFill>
                   <a:srgbClr val="111111"/>
                 </a:solidFill>
-                <a:latin typeface="Arimo" pitchFamily="34" charset="0"/>
-                <a:ea typeface="Arimo" pitchFamily="34" charset="-122"/>
-                <a:cs typeface="Arimo" pitchFamily="34" charset="-120"/>
+                <a:latin typeface="Arial" panose="020B0604020202020204"/>
+                <a:ea typeface="Arial" panose="020B0604020202020204"/>
+                <a:sym typeface="+mn-ea"/>
               </a:rPr>
-              <a:t>Primitive Skill</a:t>
-            </a:r>
-            <a:endParaRPr lang="en-US" sz="600" i="1" dirty="0">
-              <a:solidFill>
-                <a:srgbClr val="111111"/>
-              </a:solidFill>
-              <a:latin typeface="Arimo" pitchFamily="34" charset="0"/>
-              <a:ea typeface="Arimo" pitchFamily="34" charset="-122"/>
-              <a:cs typeface="Arimo" pitchFamily="34" charset="-120"/>
+              <a:t>action</a:t>
+            </a:r>
+            <a:endParaRPr lang="en-US" sz="600" b="0" strike="noStrike" spc="-1">
+              <a:latin typeface="Arial" panose="020B0604020202020204"/>
             </a:endParaRPr>
           </a:p>
         </p:txBody>
       </p:sp>
       <p:sp>
         <p:nvSpPr>
-          <p:cNvPr id="27" name="Shape 24"/>
+          <p:cNvPr id="62" name="Shape 24"/>
           <p:cNvSpPr/>
           <p:nvPr/>
         </p:nvSpPr>
         <p:spPr>
           <a:xfrm>
-            <a:off x="384810" y="1268095"/>
-            <a:ext cx="977265" cy="347345"/>
+            <a:off x="384840" y="1267920"/>
+            <a:ext cx="977040" cy="347040"/>
           </a:xfrm>
           <a:prstGeom prst="roundRect">
             <a:avLst>
@@ -1683,218 +2000,266 @@
             <a:solidFill>
               <a:srgbClr val="6A9164"/>
             </a:solidFill>
-            <a:prstDash val="solid"/>
-          </a:ln>
-        </p:spPr>
-      </p:sp>
-      <p:sp>
-        <p:nvSpPr>
-          <p:cNvPr id="28" name="Text 25"/>
-          <p:cNvSpPr txBox="1"/>
-          <p:nvPr/>
-        </p:nvSpPr>
-        <p:spPr>
-          <a:xfrm>
-            <a:off x="356870" y="1292225"/>
-            <a:ext cx="1005205" cy="323215"/>
+            <a:round/>
+          </a:ln>
+        </p:spPr>
+        <p:style>
+          <a:lnRef idx="0">
+            <a:srgbClr val="FFFFFF"/>
+          </a:lnRef>
+          <a:fillRef idx="0">
+            <a:srgbClr val="FFFFFF"/>
+          </a:fillRef>
+          <a:effectRef idx="0">
+            <a:srgbClr val="FFFFFF"/>
+          </a:effectRef>
+          <a:fontRef idx="minor"/>
+        </p:style>
+      </p:sp>
+      <p:sp>
+        <p:nvSpPr>
+          <p:cNvPr id="63" name="Text 25"/>
+          <p:cNvSpPr/>
+          <p:nvPr/>
+        </p:nvSpPr>
+        <p:spPr>
+          <a:xfrm>
+            <a:off x="356760" y="1292400"/>
+            <a:ext cx="1004760" cy="322920"/>
           </a:xfrm>
           <a:prstGeom prst="rect">
             <a:avLst/>
           </a:prstGeom>
           <a:noFill/>
-        </p:spPr>
+          <a:ln w="0">
+            <a:noFill/>
+          </a:ln>
+        </p:spPr>
+        <p:style>
+          <a:lnRef idx="0">
+            <a:srgbClr val="FFFFFF"/>
+          </a:lnRef>
+          <a:fillRef idx="0">
+            <a:srgbClr val="FFFFFF"/>
+          </a:fillRef>
+          <a:effectRef idx="0">
+            <a:srgbClr val="FFFFFF"/>
+          </a:effectRef>
+          <a:fontRef idx="minor"/>
+        </p:style>
         <p:txBody>
-          <a:bodyPr wrap="square" lIns="0" tIns="0" rIns="0" bIns="0" rtlCol="0" anchor="ctr">
+          <a:bodyPr lIns="0" tIns="0" rIns="0" bIns="0" anchor="ctr">
             <a:noAutofit/>
           </a:bodyPr>
-          <a:lstStyle/>
           <a:p>
-            <a:pPr marL="0" indent="0" algn="ctr">
+            <a:pPr algn="ctr">
+              <a:lnSpc>
+                <a:spcPct val="100000"/>
+              </a:lnSpc>
               <a:buNone/>
+              <a:tabLst>
+                <a:tab pos="0" algn="l"/>
+              </a:tabLst>
             </a:pPr>
             <a:r>
-              <a:rPr lang="en-US" sz="800" b="1" dirty="0">
+              <a:rPr lang="en-US" sz="800" b="1" strike="noStrike" spc="-1">
                 <a:solidFill>
                   <a:srgbClr val="2F7C2B"/>
                 </a:solidFill>
-                <a:latin typeface="Arimo" pitchFamily="34" charset="0"/>
-                <a:ea typeface="Arimo" pitchFamily="34" charset="-122"/>
-                <a:cs typeface="Arimo" pitchFamily="34" charset="-120"/>
+                <a:latin typeface="Arial" panose="020B0604020202020204"/>
+                <a:ea typeface="Arial" panose="020B0604020202020204"/>
               </a:rPr>
-              <a:t>Scene </a:t>
-            </a:r>
-            <a:endParaRPr lang="en-US" sz="800" b="1" dirty="0">
-              <a:solidFill>
-                <a:srgbClr val="2F7C2B"/>
-              </a:solidFill>
-              <a:latin typeface="Arimo" pitchFamily="34" charset="0"/>
-              <a:ea typeface="Arimo" pitchFamily="34" charset="-122"/>
-              <a:cs typeface="Arimo" pitchFamily="34" charset="-120"/>
+              <a:t>Visual</a:t>
+            </a:r>
+            <a:endParaRPr lang="en-US" sz="800" b="0" strike="noStrike" spc="-1">
+              <a:latin typeface="Arial" panose="020B0604020202020204"/>
             </a:endParaRPr>
           </a:p>
           <a:p>
-            <a:pPr marL="0" indent="0" algn="ctr">
+            <a:pPr algn="ctr">
+              <a:lnSpc>
+                <a:spcPct val="100000"/>
+              </a:lnSpc>
               <a:buNone/>
+              <a:tabLst>
+                <a:tab pos="0" algn="l"/>
+              </a:tabLst>
             </a:pPr>
             <a:r>
-              <a:rPr lang="en-US" sz="800" b="1" dirty="0">
+              <a:rPr lang="en-US" sz="800" b="1" strike="noStrike" spc="-1">
                 <a:solidFill>
                   <a:srgbClr val="2F7C2B"/>
                 </a:solidFill>
-                <a:latin typeface="Arimo" pitchFamily="34" charset="0"/>
-                <a:ea typeface="Arimo" pitchFamily="34" charset="-122"/>
-                <a:cs typeface="Arimo" pitchFamily="34" charset="-120"/>
+                <a:latin typeface="Arial" panose="020B0604020202020204"/>
+                <a:ea typeface="Arial" panose="020B0604020202020204"/>
               </a:rPr>
               <a:t>observation</a:t>
             </a:r>
-            <a:endParaRPr lang="en-US" sz="800" b="1" dirty="0">
-              <a:solidFill>
-                <a:srgbClr val="2F7C2B"/>
-              </a:solidFill>
-              <a:latin typeface="Arimo" pitchFamily="34" charset="0"/>
-              <a:ea typeface="Arimo" pitchFamily="34" charset="-122"/>
-              <a:cs typeface="Arimo" pitchFamily="34" charset="-120"/>
+            <a:endParaRPr lang="en-US" sz="800" b="0" strike="noStrike" spc="-1">
+              <a:latin typeface="Arial" panose="020B0604020202020204"/>
             </a:endParaRPr>
           </a:p>
         </p:txBody>
       </p:sp>
       <p:sp>
         <p:nvSpPr>
-          <p:cNvPr id="30" name="Text 27"/>
-          <p:cNvSpPr txBox="1"/>
-          <p:nvPr/>
-        </p:nvSpPr>
-        <p:spPr>
-          <a:xfrm>
-            <a:off x="4284535" y="1315527"/>
-            <a:ext cx="445770" cy="215900"/>
+          <p:cNvPr id="64" name="Text 27"/>
+          <p:cNvSpPr/>
+          <p:nvPr/>
+        </p:nvSpPr>
+        <p:spPr>
+          <a:xfrm>
+            <a:off x="4284360" y="1315440"/>
+            <a:ext cx="445320" cy="215640"/>
           </a:xfrm>
           <a:prstGeom prst="rect">
             <a:avLst/>
           </a:prstGeom>
           <a:noFill/>
-        </p:spPr>
+          <a:ln w="0">
+            <a:noFill/>
+          </a:ln>
+        </p:spPr>
+        <p:style>
+          <a:lnRef idx="0">
+            <a:srgbClr val="FFFFFF"/>
+          </a:lnRef>
+          <a:fillRef idx="0">
+            <a:srgbClr val="FFFFFF"/>
+          </a:fillRef>
+          <a:effectRef idx="0">
+            <a:srgbClr val="FFFFFF"/>
+          </a:effectRef>
+          <a:fontRef idx="minor"/>
+        </p:style>
         <p:txBody>
-          <a:bodyPr wrap="square" lIns="0" tIns="0" rIns="0" bIns="0" rtlCol="0" anchor="ctr">
+          <a:bodyPr lIns="0" tIns="0" rIns="0" bIns="0" anchor="ctr">
             <a:normAutofit/>
           </a:bodyPr>
-          <a:lstStyle/>
           <a:p>
-            <a:pPr marL="0" indent="0" algn="ctr">
+            <a:pPr algn="ctr">
+              <a:lnSpc>
+                <a:spcPct val="100000"/>
+              </a:lnSpc>
               <a:buNone/>
+              <a:tabLst>
+                <a:tab pos="0" algn="l"/>
+              </a:tabLst>
             </a:pPr>
             <a:r>
-              <a:rPr lang="en-US" sz="600" b="1" dirty="0">
+              <a:rPr lang="en-US" sz="600" b="1" strike="noStrike" spc="-1">
                 <a:solidFill>
-                  <a:schemeClr val="tx1">
-                    <a:lumMod val="50000"/>
-                    <a:lumOff val="50000"/>
-                  </a:schemeClr>
+                  <a:srgbClr val="808080"/>
                 </a:solidFill>
-                <a:latin typeface="Arimo" pitchFamily="34" charset="0"/>
-                <a:ea typeface="Arimo" pitchFamily="34" charset="-122"/>
-                <a:cs typeface="Arimo" pitchFamily="34" charset="-120"/>
+                <a:latin typeface="Arial" panose="020B0604020202020204"/>
+                <a:ea typeface="Arial" panose="020B0604020202020204"/>
               </a:rPr>
               <a:t>Execution </a:t>
             </a:r>
-            <a:endParaRPr lang="en-US" sz="600" b="1" dirty="0">
-              <a:solidFill>
-                <a:schemeClr val="tx1">
-                  <a:lumMod val="50000"/>
-                  <a:lumOff val="50000"/>
-                </a:schemeClr>
-              </a:solidFill>
-              <a:latin typeface="Arimo" pitchFamily="34" charset="0"/>
-              <a:ea typeface="Arimo" pitchFamily="34" charset="-122"/>
-              <a:cs typeface="Arimo" pitchFamily="34" charset="-120"/>
+            <a:endParaRPr lang="en-US" sz="600" b="0" strike="noStrike" spc="-1">
+              <a:latin typeface="Arial" panose="020B0604020202020204"/>
             </a:endParaRPr>
           </a:p>
           <a:p>
-            <a:pPr marL="0" indent="0" algn="ctr">
+            <a:pPr algn="ctr">
+              <a:lnSpc>
+                <a:spcPct val="100000"/>
+              </a:lnSpc>
               <a:buNone/>
+              <a:tabLst>
+                <a:tab pos="0" algn="l"/>
+              </a:tabLst>
             </a:pPr>
             <a:r>
-              <a:rPr lang="en-US" sz="600" b="1" dirty="0">
+              <a:rPr lang="en-US" sz="600" b="1" strike="noStrike" spc="-1">
                 <a:solidFill>
-                  <a:schemeClr val="tx1">
-                    <a:lumMod val="50000"/>
-                    <a:lumOff val="50000"/>
-                  </a:schemeClr>
+                  <a:srgbClr val="808080"/>
                 </a:solidFill>
-                <a:latin typeface="Arimo" pitchFamily="34" charset="0"/>
-                <a:ea typeface="Arimo" pitchFamily="34" charset="-122"/>
-                <a:cs typeface="Arimo" pitchFamily="34" charset="-120"/>
+                <a:latin typeface="Arial" panose="020B0604020202020204"/>
+                <a:ea typeface="Arial" panose="020B0604020202020204"/>
               </a:rPr>
               <a:t>evidence</a:t>
             </a:r>
-            <a:endParaRPr lang="en-US" sz="600" b="1" dirty="0">
-              <a:solidFill>
-                <a:schemeClr val="tx1">
-                  <a:lumMod val="50000"/>
-                  <a:lumOff val="50000"/>
-                </a:schemeClr>
-              </a:solidFill>
-              <a:latin typeface="Arimo" pitchFamily="34" charset="0"/>
-              <a:ea typeface="Arimo" pitchFamily="34" charset="-122"/>
-              <a:cs typeface="Arimo" pitchFamily="34" charset="-120"/>
+            <a:endParaRPr lang="en-US" sz="600" b="0" strike="noStrike" spc="-1">
+              <a:latin typeface="Arial" panose="020B0604020202020204"/>
             </a:endParaRPr>
           </a:p>
         </p:txBody>
       </p:sp>
       <p:sp>
         <p:nvSpPr>
-          <p:cNvPr id="31" name="Shape 28"/>
+          <p:cNvPr id="65" name="Shape 28"/>
           <p:cNvSpPr/>
           <p:nvPr/>
         </p:nvSpPr>
         <p:spPr>
-          <a:xfrm rot="10800000">
-            <a:off x="888365" y="942975"/>
-            <a:ext cx="635" cy="322580"/>
+          <a:xfrm flipH="1" flipV="1">
+            <a:off x="888120" y="942840"/>
+            <a:ext cx="720" cy="322560"/>
           </a:xfrm>
           <a:prstGeom prst="line">
             <a:avLst/>
           </a:prstGeom>
-          <a:noFill/>
           <a:ln w="15875">
             <a:solidFill>
               <a:srgbClr val="111111"/>
             </a:solidFill>
-            <a:prstDash val="solid"/>
-            <a:tailEnd type="triangle"/>
-          </a:ln>
-        </p:spPr>
-      </p:sp>
-      <p:sp>
-        <p:nvSpPr>
-          <p:cNvPr id="32" name="Shape 29"/>
+            <a:round/>
+            <a:tailEnd type="triangle" w="med" len="med"/>
+          </a:ln>
+        </p:spPr>
+        <p:style>
+          <a:lnRef idx="0">
+            <a:srgbClr val="FFFFFF"/>
+          </a:lnRef>
+          <a:fillRef idx="0">
+            <a:srgbClr val="FFFFFF"/>
+          </a:fillRef>
+          <a:effectRef idx="0">
+            <a:srgbClr val="FFFFFF"/>
+          </a:effectRef>
+          <a:fontRef idx="minor"/>
+        </p:style>
+      </p:sp>
+      <p:sp>
+        <p:nvSpPr>
+          <p:cNvPr id="66" name="Shape 29"/>
           <p:cNvSpPr/>
           <p:nvPr/>
         </p:nvSpPr>
         <p:spPr>
-          <a:xfrm rot="10800000">
-            <a:off x="883285" y="1615440"/>
-            <a:ext cx="635" cy="318770"/>
+          <a:xfrm flipH="1" flipV="1">
+            <a:off x="883080" y="1615320"/>
+            <a:ext cx="720" cy="318600"/>
           </a:xfrm>
           <a:prstGeom prst="line">
             <a:avLst/>
           </a:prstGeom>
-          <a:noFill/>
           <a:ln w="15875">
             <a:solidFill>
               <a:srgbClr val="111111"/>
             </a:solidFill>
-            <a:prstDash val="solid"/>
-            <a:tailEnd type="triangle"/>
-          </a:ln>
-        </p:spPr>
+            <a:round/>
+            <a:tailEnd type="triangle" w="med" len="med"/>
+          </a:ln>
+        </p:spPr>
+        <p:style>
+          <a:lnRef idx="0">
+            <a:srgbClr val="FFFFFF"/>
+          </a:lnRef>
+          <a:fillRef idx="0">
+            <a:srgbClr val="FFFFFF"/>
+          </a:fillRef>
+          <a:effectRef idx="0">
+            <a:srgbClr val="FFFFFF"/>
+          </a:effectRef>
+          <a:fontRef idx="minor"/>
+        </p:style>
       </p:sp>
       <p:pic>
         <p:nvPicPr>
-          <p:cNvPr id="35" name="图片 34"/>
-          <p:cNvPicPr>
-            <a:picLocks noChangeAspect="1"/>
-          </p:cNvPicPr>
+          <p:cNvPr id="67" name="图片 34"/>
+          <p:cNvPicPr/>
           <p:nvPr/>
         </p:nvPicPr>
         <p:blipFill>
@@ -1905,24 +2270,27 @@
         </p:blipFill>
         <p:spPr>
           <a:xfrm>
-            <a:off x="1685480" y="95692"/>
-            <a:ext cx="186690" cy="215900"/>
+            <a:off x="1685520" y="95760"/>
+            <a:ext cx="186480" cy="215640"/>
           </a:xfrm>
           <a:prstGeom prst="rect">
             <a:avLst/>
           </a:prstGeom>
+          <a:ln w="0">
+            <a:noFill/>
+          </a:ln>
         </p:spPr>
       </p:pic>
       <p:sp>
         <p:nvSpPr>
-          <p:cNvPr id="38" name="矩形标注 37"/>
+          <p:cNvPr id="68" name="矩形标注 37"/>
           <p:cNvSpPr/>
           <p:nvPr/>
         </p:nvSpPr>
         <p:spPr>
           <a:xfrm rot="5400000">
-            <a:off x="2710370" y="-624398"/>
-            <a:ext cx="375920" cy="1753235"/>
+            <a:off x="2710800" y="-624600"/>
+            <a:ext cx="375480" cy="1752840"/>
           </a:xfrm>
           <a:prstGeom prst="wedgeRectCallout">
             <a:avLst>
@@ -1937,149 +2305,201 @@
             <a:solidFill>
               <a:srgbClr val="9A8F80"/>
             </a:solidFill>
-            <a:prstDash val="solid"/>
-          </a:ln>
-        </p:spPr>
+            <a:round/>
+          </a:ln>
+        </p:spPr>
+        <p:style>
+          <a:lnRef idx="0">
+            <a:srgbClr val="FFFFFF"/>
+          </a:lnRef>
+          <a:fillRef idx="0">
+            <a:srgbClr val="FFFFFF"/>
+          </a:fillRef>
+          <a:effectRef idx="0">
+            <a:srgbClr val="FFFFFF"/>
+          </a:effectRef>
+          <a:fontRef idx="minor"/>
+        </p:style>
+      </p:sp>
+      <p:sp>
+        <p:nvSpPr>
+          <p:cNvPr id="69" name="Text 2"/>
+          <p:cNvSpPr/>
+          <p:nvPr/>
+        </p:nvSpPr>
+        <p:spPr>
+          <a:xfrm>
+            <a:off x="2114640" y="157320"/>
+            <a:ext cx="1649880" cy="323640"/>
+          </a:xfrm>
+          <a:prstGeom prst="rect">
+            <a:avLst/>
+          </a:prstGeom>
+          <a:noFill/>
+          <a:ln w="0">
+            <a:noFill/>
+          </a:ln>
+        </p:spPr>
+        <p:style>
+          <a:lnRef idx="0">
+            <a:srgbClr val="FFFFFF"/>
+          </a:lnRef>
+          <a:fillRef idx="0">
+            <a:srgbClr val="FFFFFF"/>
+          </a:fillRef>
+          <a:effectRef idx="0">
+            <a:srgbClr val="FFFFFF"/>
+          </a:effectRef>
+          <a:fontRef idx="minor"/>
+        </p:style>
         <p:txBody>
-          <a:bodyPr vertOverflow="overflow" horzOverflow="overflow" vert="horz" wrap="square" numCol="1" spcCol="0" rtlCol="0" fromWordArt="0" anchor="ctr" anchorCtr="0" forceAA="0" compatLnSpc="1">
+          <a:bodyPr lIns="0" tIns="0" rIns="0" bIns="0" anchor="ctr">
+            <a:normAutofit/>
+          </a:bodyPr>
+          <a:p>
+            <a:pPr algn="ctr">
+              <a:lnSpc>
+                <a:spcPct val="100000"/>
+              </a:lnSpc>
+              <a:buNone/>
+            </a:pPr>
+            <a:r>
+              <a:rPr lang="en-US" sz="620" b="0" i="1" strike="noStrike" spc="-1">
+                <a:solidFill>
+                  <a:srgbClr val="111111"/>
+                </a:solidFill>
+                <a:latin typeface="Arial" panose="020B0604020202020204"/>
+                <a:ea typeface="Arial" panose="020B0604020202020204"/>
+              </a:rPr>
+              <a:t>“</a:t>
+            </a:r>
+            <a:r>
+              <a:rPr lang="en-US" sz="620" b="0" i="1" strike="noStrike" spc="-1">
+                <a:solidFill>
+                  <a:srgbClr val="111111"/>
+                </a:solidFill>
+                <a:latin typeface="Arial" panose="020B0604020202020204"/>
+                <a:ea typeface="Arial" panose="020B0604020202020204"/>
+              </a:rPr>
+              <a:t>I need two bottles of cola in the basket</a:t>
+            </a:r>
+            <a:endParaRPr lang="en-US" sz="620" b="0" strike="noStrike" spc="-1">
+              <a:latin typeface="Arial" panose="020B0604020202020204"/>
+            </a:endParaRPr>
+          </a:p>
+          <a:p>
+            <a:pPr algn="ctr">
+              <a:lnSpc>
+                <a:spcPct val="100000"/>
+              </a:lnSpc>
+              <a:buNone/>
+            </a:pPr>
+            <a:r>
+              <a:rPr lang="en-US" sz="620" b="0" i="1" strike="noStrike" spc="-1">
+                <a:solidFill>
+                  <a:srgbClr val="111111"/>
+                </a:solidFill>
+                <a:latin typeface="Arial" panose="020B0604020202020204"/>
+                <a:ea typeface="Arial" panose="020B0604020202020204"/>
+              </a:rPr>
+              <a:t>and clear the right table.”  </a:t>
+            </a:r>
+            <a:endParaRPr lang="en-US" sz="620" b="0" strike="noStrike" spc="-1">
+              <a:latin typeface="Arial" panose="020B0604020202020204"/>
+            </a:endParaRPr>
+          </a:p>
+        </p:txBody>
+      </p:sp>
+      <p:pic>
+        <p:nvPicPr>
+          <p:cNvPr id="70" name="图片 40" descr="camera"/>
+          <p:cNvPicPr/>
+          <p:nvPr/>
+        </p:nvPicPr>
+        <p:blipFill>
+          <a:blip r:embed="rId4"/>
+          <a:stretch>
+            <a:fillRect/>
+          </a:stretch>
+        </p:blipFill>
+        <p:spPr>
+          <a:xfrm>
+            <a:off x="760320" y="1911960"/>
+            <a:ext cx="245880" cy="245880"/>
+          </a:xfrm>
+          <a:prstGeom prst="rect">
+            <a:avLst/>
+          </a:prstGeom>
+          <a:ln w="0">
+            <a:noFill/>
+          </a:ln>
+        </p:spPr>
+      </p:pic>
+      <p:sp>
+        <p:nvSpPr>
+          <p:cNvPr id="71" name="Text 5"/>
+          <p:cNvSpPr/>
+          <p:nvPr/>
+        </p:nvSpPr>
+        <p:spPr>
+          <a:xfrm>
+            <a:off x="1944000" y="95760"/>
+            <a:ext cx="1820520" cy="123120"/>
+          </a:xfrm>
+          <a:prstGeom prst="rect">
+            <a:avLst/>
+          </a:prstGeom>
+          <a:noFill/>
+          <a:ln w="0">
+            <a:noFill/>
+          </a:ln>
+        </p:spPr>
+        <p:style>
+          <a:lnRef idx="0">
+            <a:srgbClr val="FFFFFF"/>
+          </a:lnRef>
+          <a:fillRef idx="0">
+            <a:srgbClr val="FFFFFF"/>
+          </a:fillRef>
+          <a:effectRef idx="0">
+            <a:srgbClr val="FFFFFF"/>
+          </a:effectRef>
+          <a:fontRef idx="minor"/>
+        </p:style>
+        <p:txBody>
+          <a:bodyPr lIns="0" tIns="0" rIns="0" bIns="0" anchor="ctr">
             <a:noAutofit/>
           </a:bodyPr>
           <a:p>
-            <a:pPr lvl="0" algn="ctr">
-              <a:buClrTx/>
-              <a:buSzTx/>
-              <a:buFontTx/>
+            <a:pPr algn="ctr">
+              <a:lnSpc>
+                <a:spcPct val="100000"/>
+              </a:lnSpc>
+              <a:buNone/>
+              <a:tabLst>
+                <a:tab pos="0" algn="l"/>
+              </a:tabLst>
             </a:pPr>
-            <a:endParaRPr lang="zh-CN" altLang="en-US">
-              <a:sym typeface="+mn-ea"/>
+            <a:r>
+              <a:rPr lang="en-US" sz="800" b="1" strike="noStrike" spc="-1">
+                <a:solidFill>
+                  <a:srgbClr val="806000"/>
+                </a:solidFill>
+                <a:latin typeface="Arial" panose="020B0604020202020204"/>
+                <a:ea typeface="Arial" panose="020B0604020202020204"/>
+              </a:rPr>
+              <a:t>Task Instruction</a:t>
+            </a:r>
+            <a:endParaRPr lang="en-US" sz="800" b="0" strike="noStrike" spc="-1">
+              <a:latin typeface="Arial" panose="020B0604020202020204"/>
             </a:endParaRPr>
           </a:p>
         </p:txBody>
       </p:sp>
-      <p:sp>
-        <p:nvSpPr>
-          <p:cNvPr id="40" name="Text 2"/>
-          <p:cNvSpPr txBox="1"/>
-          <p:nvPr>
-            <p:custDataLst>
-              <p:tags r:id="rId4"/>
-            </p:custDataLst>
-          </p:nvPr>
-        </p:nvSpPr>
-        <p:spPr>
-          <a:xfrm>
-            <a:off x="2114740" y="157287"/>
-            <a:ext cx="1650365" cy="323850"/>
-          </a:xfrm>
-          <a:prstGeom prst="rect">
-            <a:avLst/>
-          </a:prstGeom>
-          <a:noFill/>
-        </p:spPr>
-        <p:txBody>
-          <a:bodyPr wrap="square" lIns="0" tIns="0" rIns="0" bIns="0" rtlCol="0" anchor="ctr">
-            <a:normAutofit/>
-          </a:bodyPr>
-          <a:p>
-            <a:pPr lvl="0" algn="ctr">
-              <a:buClrTx/>
-              <a:buSzTx/>
-              <a:buFontTx/>
-            </a:pPr>
-            <a:r>
-              <a:rPr lang="en-US" sz="625" i="1" dirty="0">
-                <a:solidFill>
-                  <a:srgbClr val="111111"/>
-                </a:solidFill>
-                <a:latin typeface="Arimo" pitchFamily="34" charset="0"/>
-                <a:ea typeface="Arimo" pitchFamily="34" charset="-122"/>
-                <a:cs typeface="Arimo" pitchFamily="34" charset="-120"/>
-                <a:sym typeface="+mn-ea"/>
-              </a:rPr>
-              <a:t>“</a:t>
-            </a:r>
-            <a:r>
-              <a:rPr lang="en-US" sz="625" i="1" dirty="0">
-                <a:solidFill>
-                  <a:srgbClr val="111111"/>
-                </a:solidFill>
-                <a:latin typeface="Arimo" pitchFamily="34" charset="0"/>
-                <a:ea typeface="Arimo" pitchFamily="34" charset="-122"/>
-                <a:cs typeface="Arimo" pitchFamily="34" charset="-120"/>
-                <a:sym typeface="+mn-ea"/>
-              </a:rPr>
-              <a:t>I need two bottles of cola in the basket</a:t>
-            </a:r>
-            <a:endParaRPr lang="en-US" sz="625" i="1" dirty="0">
-              <a:solidFill>
-                <a:srgbClr val="111111"/>
-              </a:solidFill>
-              <a:latin typeface="Arimo" pitchFamily="34" charset="0"/>
-              <a:ea typeface="Arimo" pitchFamily="34" charset="-122"/>
-              <a:cs typeface="Arimo" pitchFamily="34" charset="-120"/>
-              <a:sym typeface="+mn-ea"/>
-            </a:endParaRPr>
-          </a:p>
-          <a:p>
-            <a:pPr lvl="0" algn="ctr">
-              <a:buClrTx/>
-              <a:buSzTx/>
-              <a:buFontTx/>
-            </a:pPr>
-            <a:r>
-              <a:rPr lang="en-US" sz="625" i="1" dirty="0">
-                <a:solidFill>
-                  <a:srgbClr val="111111"/>
-                </a:solidFill>
-                <a:latin typeface="Arimo" pitchFamily="34" charset="0"/>
-                <a:ea typeface="Arimo" pitchFamily="34" charset="-122"/>
-                <a:cs typeface="Arimo" pitchFamily="34" charset="-120"/>
-                <a:sym typeface="+mn-ea"/>
-              </a:rPr>
-              <a:t>and</a:t>
-            </a:r>
-            <a:r>
-              <a:rPr lang="en-US" sz="625" i="1" dirty="0">
-                <a:solidFill>
-                  <a:srgbClr val="111111"/>
-                </a:solidFill>
-                <a:latin typeface="Arimo" pitchFamily="34" charset="0"/>
-                <a:ea typeface="Arimo" pitchFamily="34" charset="-122"/>
-                <a:cs typeface="Arimo" pitchFamily="34" charset="-120"/>
-                <a:sym typeface="+mn-ea"/>
-              </a:rPr>
-              <a:t> clear the right table.”</a:t>
-            </a:r>
-            <a:r>
-              <a:rPr lang="en-US" sz="625" i="1" dirty="0">
-                <a:solidFill>
-                  <a:srgbClr val="111111"/>
-                </a:solidFill>
-                <a:latin typeface="Arimo" pitchFamily="34" charset="0"/>
-                <a:ea typeface="Arimo" pitchFamily="34" charset="-122"/>
-                <a:cs typeface="Arimo" pitchFamily="34" charset="-120"/>
-                <a:sym typeface="+mn-ea"/>
-              </a:rPr>
-              <a:t>  </a:t>
-            </a:r>
-            <a:endParaRPr lang="en-US" sz="625" i="1" dirty="0">
-              <a:solidFill>
-                <a:srgbClr val="111111"/>
-              </a:solidFill>
-              <a:latin typeface="Arimo" pitchFamily="34" charset="0"/>
-              <a:ea typeface="Arimo" pitchFamily="34" charset="-122"/>
-              <a:cs typeface="Arimo" pitchFamily="34" charset="-120"/>
-              <a:sym typeface="+mn-ea"/>
-            </a:endParaRPr>
-          </a:p>
-        </p:txBody>
-      </p:sp>
       <p:pic>
         <p:nvPicPr>
-          <p:cNvPr id="41" name="图片 40" descr="camera"/>
-          <p:cNvPicPr>
-            <a:picLocks noChangeAspect="1"/>
-          </p:cNvPicPr>
+          <p:cNvPr id="72" name="图片 43" descr="robotic-arm"/>
+          <p:cNvPicPr/>
           <p:nvPr/>
         </p:nvPicPr>
         <p:blipFill>
@@ -2090,72 +2510,46 @@
         </p:blipFill>
         <p:spPr>
           <a:xfrm>
-            <a:off x="760285" y="1911792"/>
-            <a:ext cx="246380" cy="246380"/>
+            <a:off x="4392000" y="1536480"/>
+            <a:ext cx="230760" cy="230760"/>
           </a:xfrm>
           <a:prstGeom prst="rect">
             <a:avLst/>
           </a:prstGeom>
+          <a:ln w="0">
+            <a:noFill/>
+          </a:ln>
         </p:spPr>
       </p:pic>
-      <p:sp>
-        <p:nvSpPr>
-          <p:cNvPr id="42" name="Text 5"/>
-          <p:cNvSpPr txBox="1"/>
-          <p:nvPr>
-            <p:custDataLst>
-              <p:tags r:id="rId6"/>
-            </p:custDataLst>
-          </p:nvPr>
-        </p:nvSpPr>
-        <p:spPr>
-          <a:xfrm>
-            <a:off x="1944125" y="95811"/>
-            <a:ext cx="1820915" cy="123452"/>
-          </a:xfrm>
-          <a:prstGeom prst="rect">
-            <a:avLst/>
-          </a:prstGeom>
-          <a:noFill/>
-        </p:spPr>
-        <p:txBody>
-          <a:bodyPr wrap="square" lIns="0" tIns="0" rIns="0" bIns="0" rtlCol="0" anchor="ctr"/>
-          <a:p>
-            <a:pPr marL="0" indent="0" algn="ctr">
-              <a:buNone/>
-            </a:pPr>
-            <a:r>
-              <a:rPr lang="en-US" sz="800" b="1" dirty="0">
-                <a:solidFill>
-                  <a:schemeClr val="accent4">
-                    <a:lumMod val="50000"/>
-                  </a:schemeClr>
-                </a:solidFill>
-                <a:latin typeface="Arimo" pitchFamily="34" charset="0"/>
-                <a:ea typeface="Arimo" pitchFamily="34" charset="-122"/>
-                <a:cs typeface="Arimo" pitchFamily="34" charset="-120"/>
-              </a:rPr>
-              <a:t>Task Instruction</a:t>
-            </a:r>
-            <a:endParaRPr lang="en-US" sz="800" b="1" dirty="0">
-              <a:solidFill>
-                <a:schemeClr val="accent4">
-                  <a:lumMod val="50000"/>
-                </a:schemeClr>
-              </a:solidFill>
-              <a:latin typeface="Arimo" pitchFamily="34" charset="0"/>
-              <a:ea typeface="Arimo" pitchFamily="34" charset="-122"/>
-              <a:cs typeface="Arimo" pitchFamily="34" charset="-120"/>
-            </a:endParaRPr>
-          </a:p>
-        </p:txBody>
-      </p:sp>
       <p:pic>
         <p:nvPicPr>
-          <p:cNvPr id="44" name="图片 43" descr="robotic-arm"/>
-          <p:cNvPicPr>
-            <a:picLocks noChangeAspect="1"/>
-          </p:cNvPicPr>
+          <p:cNvPr id="73" name="图片 44" descr="agents"/>
+          <p:cNvPicPr/>
+          <p:nvPr/>
+        </p:nvPicPr>
+        <p:blipFill>
+          <a:blip r:embed="rId6"/>
+          <a:stretch>
+            <a:fillRect/>
+          </a:stretch>
+        </p:blipFill>
+        <p:spPr>
+          <a:xfrm>
+            <a:off x="2287440" y="629640"/>
+            <a:ext cx="186840" cy="186840"/>
+          </a:xfrm>
+          <a:prstGeom prst="rect">
+            <a:avLst/>
+          </a:prstGeom>
+          <a:ln w="0">
+            <a:noFill/>
+          </a:ln>
+        </p:spPr>
+      </p:pic>
+      <p:pic>
+        <p:nvPicPr>
+          <p:cNvPr id="74" name="图片 46" descr="database"/>
+          <p:cNvPicPr/>
           <p:nvPr/>
         </p:nvPicPr>
         <p:blipFill>
@@ -2166,133 +2560,72 @@
         </p:blipFill>
         <p:spPr>
           <a:xfrm>
-            <a:off x="4391850" y="1536507"/>
-            <a:ext cx="231140" cy="231140"/>
+            <a:off x="2187000" y="1366920"/>
+            <a:ext cx="131760" cy="150840"/>
           </a:xfrm>
           <a:prstGeom prst="rect">
             <a:avLst/>
           </a:prstGeom>
+          <a:ln w="0">
+            <a:noFill/>
+          </a:ln>
         </p:spPr>
       </p:pic>
       <p:pic>
         <p:nvPicPr>
-          <p:cNvPr id="45" name="图片 44" descr="agents"/>
-          <p:cNvPicPr>
-            <a:picLocks noChangeAspect="1"/>
-          </p:cNvPicPr>
-          <p:nvPr>
-            <p:custDataLst>
-              <p:tags r:id="rId8"/>
-            </p:custDataLst>
-          </p:nvPr>
+          <p:cNvPr id="75" name="图片 47" descr="agents"/>
+          <p:cNvPicPr/>
+          <p:nvPr/>
         </p:nvPicPr>
         <p:blipFill>
-          <a:blip r:embed="rId9"/>
+          <a:blip r:embed="rId6"/>
           <a:stretch>
             <a:fillRect/>
           </a:stretch>
         </p:blipFill>
         <p:spPr>
           <a:xfrm>
-            <a:off x="2287460" y="629727"/>
-            <a:ext cx="187325" cy="187325"/>
+            <a:off x="4272480" y="499680"/>
+            <a:ext cx="186840" cy="186840"/>
           </a:xfrm>
           <a:prstGeom prst="rect">
             <a:avLst/>
           </a:prstGeom>
+          <a:ln w="0">
+            <a:noFill/>
+          </a:ln>
         </p:spPr>
       </p:pic>
       <p:pic>
         <p:nvPicPr>
-          <p:cNvPr id="47" name="图片 46" descr="database"/>
-          <p:cNvPicPr>
-            <a:picLocks noChangeAspect="1"/>
-          </p:cNvPicPr>
+          <p:cNvPr id="76" name="图片 48" descr="agents"/>
+          <p:cNvPicPr/>
           <p:nvPr/>
         </p:nvPicPr>
         <p:blipFill>
-          <a:blip r:embed="rId10"/>
+          <a:blip r:embed="rId6"/>
           <a:stretch>
             <a:fillRect/>
           </a:stretch>
         </p:blipFill>
         <p:spPr>
           <a:xfrm>
-            <a:off x="2187130" y="1366962"/>
-            <a:ext cx="132080" cy="151130"/>
+            <a:off x="322920" y="503280"/>
+            <a:ext cx="186840" cy="186840"/>
           </a:xfrm>
           <a:prstGeom prst="rect">
             <a:avLst/>
           </a:prstGeom>
+          <a:ln w="0">
+            <a:noFill/>
+          </a:ln>
         </p:spPr>
       </p:pic>
       <p:pic>
         <p:nvPicPr>
-          <p:cNvPr id="48" name="图片 47" descr="agents"/>
-          <p:cNvPicPr>
-            <a:picLocks noChangeAspect="1"/>
-          </p:cNvPicPr>
-          <p:nvPr>
-            <p:custDataLst>
-              <p:tags r:id="rId11"/>
-            </p:custDataLst>
-          </p:nvPr>
-        </p:nvPicPr>
-        <p:blipFill>
-          <a:blip r:embed="rId9"/>
-          <a:stretch>
-            <a:fillRect/>
-          </a:stretch>
-        </p:blipFill>
-        <p:spPr>
-          <a:xfrm>
-            <a:off x="4272470" y="499552"/>
-            <a:ext cx="187325" cy="187325"/>
-          </a:xfrm>
-          <a:prstGeom prst="rect">
-            <a:avLst/>
-          </a:prstGeom>
-        </p:spPr>
-      </p:pic>
-      <p:pic>
-        <p:nvPicPr>
-          <p:cNvPr id="49" name="图片 48" descr="agents"/>
-          <p:cNvPicPr>
-            <a:picLocks noChangeAspect="1"/>
-          </p:cNvPicPr>
-          <p:nvPr>
-            <p:custDataLst>
-              <p:tags r:id="rId12"/>
-            </p:custDataLst>
-          </p:nvPr>
-        </p:nvPicPr>
-        <p:blipFill>
-          <a:blip r:embed="rId9"/>
-          <a:stretch>
-            <a:fillRect/>
-          </a:stretch>
-        </p:blipFill>
-        <p:spPr>
-          <a:xfrm>
-            <a:off x="322770" y="503362"/>
-            <a:ext cx="187325" cy="187325"/>
-          </a:xfrm>
-          <a:prstGeom prst="rect">
-            <a:avLst/>
-          </a:prstGeom>
-        </p:spPr>
-      </p:pic>
-      <p:pic>
-        <p:nvPicPr>
-          <p:cNvPr id="54" name="图片 53"/>
-          <p:cNvPicPr>
-            <a:picLocks noChangeAspect="1"/>
-          </p:cNvPicPr>
-          <p:nvPr>
-            <p:custDataLst>
-              <p:tags r:id="rId13"/>
-            </p:custDataLst>
-          </p:nvPr>
+          <p:cNvPr id="77" name="图片 53"/>
+          <p:cNvPicPr/>
+          <p:nvPr/>
         </p:nvPicPr>
         <p:blipFill>
           <a:blip r:embed="rId3"/>
@@ -2302,28 +2635,27 @@
         </p:blipFill>
         <p:spPr>
           <a:xfrm>
-            <a:off x="5414200" y="1536507"/>
-            <a:ext cx="186690" cy="215900"/>
+            <a:off x="5414040" y="1536480"/>
+            <a:ext cx="186480" cy="215640"/>
           </a:xfrm>
           <a:prstGeom prst="rect">
             <a:avLst/>
           </a:prstGeom>
+          <a:ln w="0">
+            <a:noFill/>
+          </a:ln>
         </p:spPr>
       </p:pic>
       <p:sp>
         <p:nvSpPr>
-          <p:cNvPr id="55" name="矩形标注 54"/>
+          <p:cNvPr id="78" name="矩形标注 54"/>
           <p:cNvSpPr/>
-          <p:nvPr>
-            <p:custDataLst>
-              <p:tags r:id="rId14"/>
-            </p:custDataLst>
-          </p:nvPr>
+          <p:nvPr/>
         </p:nvSpPr>
         <p:spPr>
           <a:xfrm rot="10800000">
-            <a:off x="4890770" y="1934210"/>
-            <a:ext cx="852805" cy="338455"/>
+            <a:off x="4890960" y="1934640"/>
+            <a:ext cx="852480" cy="338040"/>
           </a:xfrm>
           <a:prstGeom prst="wedgeRectCallout">
             <a:avLst>
@@ -2342,306 +2674,299 @@
                 <a:alpha val="67000"/>
               </a:srgbClr>
             </a:solidFill>
-            <a:prstDash val="solid"/>
-          </a:ln>
-        </p:spPr>
+            <a:round/>
+          </a:ln>
+        </p:spPr>
+        <p:style>
+          <a:lnRef idx="0">
+            <a:srgbClr val="FFFFFF"/>
+          </a:lnRef>
+          <a:fillRef idx="0">
+            <a:srgbClr val="FFFFFF"/>
+          </a:fillRef>
+          <a:effectRef idx="0">
+            <a:srgbClr val="FFFFFF"/>
+          </a:effectRef>
+          <a:fontRef idx="minor"/>
+        </p:style>
+      </p:sp>
+      <p:sp>
+        <p:nvSpPr>
+          <p:cNvPr id="79" name="Text 2"/>
+          <p:cNvSpPr/>
+          <p:nvPr/>
+        </p:nvSpPr>
+        <p:spPr>
+          <a:xfrm>
+            <a:off x="4890600" y="1934280"/>
+            <a:ext cx="868320" cy="338760"/>
+          </a:xfrm>
+          <a:prstGeom prst="rect">
+            <a:avLst/>
+          </a:prstGeom>
+          <a:noFill/>
+          <a:ln w="0">
+            <a:noFill/>
+          </a:ln>
+        </p:spPr>
+        <p:style>
+          <a:lnRef idx="0">
+            <a:srgbClr val="FFFFFF"/>
+          </a:lnRef>
+          <a:fillRef idx="0">
+            <a:srgbClr val="FFFFFF"/>
+          </a:fillRef>
+          <a:effectRef idx="0">
+            <a:srgbClr val="FFFFFF"/>
+          </a:effectRef>
+          <a:fontRef idx="minor"/>
+        </p:style>
         <p:txBody>
-          <a:bodyPr vertOverflow="overflow" horzOverflow="overflow" vert="horz" wrap="square" numCol="1" spcCol="0" rtlCol="0" fromWordArt="0" anchor="ctr" anchorCtr="0" forceAA="0" compatLnSpc="1">
-            <a:noAutofit/>
+          <a:bodyPr lIns="0" tIns="0" rIns="0" bIns="0" anchor="ctr">
+            <a:normAutofit/>
           </a:bodyPr>
           <a:p>
-            <a:pPr lvl="0" algn="ctr">
-              <a:buClrTx/>
-              <a:buSzTx/>
-              <a:buFontTx/>
+            <a:pPr algn="ctr">
+              <a:lnSpc>
+                <a:spcPct val="100000"/>
+              </a:lnSpc>
+              <a:buNone/>
             </a:pPr>
-            <a:endParaRPr lang="zh-CN" altLang="en-US">
-              <a:sym typeface="+mn-ea"/>
+            <a:r>
+              <a:rPr lang="en-US" sz="620" b="0" i="1" strike="noStrike" spc="-1">
+                <a:solidFill>
+                  <a:srgbClr val="111111"/>
+                </a:solidFill>
+                <a:latin typeface="Arial" panose="020B0604020202020204"/>
+                <a:ea typeface="Arial" panose="020B0604020202020204"/>
+              </a:rPr>
+              <a:t>“</a:t>
+            </a:r>
+            <a:r>
+              <a:rPr lang="en-US" sz="620" b="0" i="1" strike="noStrike" spc="-1">
+                <a:solidFill>
+                  <a:srgbClr val="111111"/>
+                </a:solidFill>
+                <a:latin typeface="Arial" panose="020B0604020202020204"/>
+                <a:ea typeface="Arial" panose="020B0604020202020204"/>
+              </a:rPr>
+              <a:t>Actually I want one more can of cola.”  </a:t>
+            </a:r>
+            <a:endParaRPr lang="en-US" sz="620" b="0" strike="noStrike" spc="-1">
+              <a:latin typeface="Arial" panose="020B0604020202020204"/>
             </a:endParaRPr>
           </a:p>
         </p:txBody>
       </p:sp>
-      <p:sp>
-        <p:nvSpPr>
-          <p:cNvPr id="56" name="Text 2"/>
-          <p:cNvSpPr txBox="1"/>
-          <p:nvPr>
-            <p:custDataLst>
-              <p:tags r:id="rId15"/>
-            </p:custDataLst>
-          </p:nvPr>
-        </p:nvSpPr>
-        <p:spPr>
-          <a:xfrm>
-            <a:off x="4890770" y="1934210"/>
-            <a:ext cx="868680" cy="339090"/>
-          </a:xfrm>
-          <a:prstGeom prst="rect">
-            <a:avLst/>
-          </a:prstGeom>
-          <a:noFill/>
-        </p:spPr>
-        <p:txBody>
-          <a:bodyPr wrap="square" lIns="0" tIns="0" rIns="0" bIns="0" rtlCol="0" anchor="ctr">
-            <a:normAutofit/>
-          </a:bodyPr>
-          <a:p>
-            <a:pPr lvl="0" algn="ctr">
-              <a:buClrTx/>
-              <a:buSzTx/>
-              <a:buFontTx/>
-            </a:pPr>
-            <a:r>
-              <a:rPr lang="en-US" sz="625" i="1" dirty="0">
-                <a:solidFill>
-                  <a:srgbClr val="111111"/>
-                </a:solidFill>
-                <a:latin typeface="Arimo" pitchFamily="34" charset="0"/>
-                <a:ea typeface="Arimo" pitchFamily="34" charset="-122"/>
-                <a:cs typeface="Arimo" pitchFamily="34" charset="-120"/>
-                <a:sym typeface="+mn-ea"/>
-              </a:rPr>
-              <a:t>“Actually I want one more can of cola.</a:t>
-            </a:r>
-            <a:r>
-              <a:rPr lang="en-US" sz="625" i="1" dirty="0">
-                <a:solidFill>
-                  <a:srgbClr val="111111"/>
-                </a:solidFill>
-                <a:latin typeface="Arimo" pitchFamily="34" charset="0"/>
-                <a:ea typeface="Arimo" pitchFamily="34" charset="-122"/>
-                <a:cs typeface="Arimo" pitchFamily="34" charset="-120"/>
-                <a:sym typeface="+mn-ea"/>
-              </a:rPr>
-              <a:t>”</a:t>
-            </a:r>
-            <a:r>
-              <a:rPr lang="en-US" sz="625" i="1" dirty="0">
-                <a:solidFill>
-                  <a:srgbClr val="111111"/>
-                </a:solidFill>
-                <a:latin typeface="Arimo" pitchFamily="34" charset="0"/>
-                <a:ea typeface="Arimo" pitchFamily="34" charset="-122"/>
-                <a:cs typeface="Arimo" pitchFamily="34" charset="-120"/>
-                <a:sym typeface="+mn-ea"/>
-              </a:rPr>
-              <a:t>  </a:t>
-            </a:r>
-            <a:endParaRPr lang="en-US" sz="625" i="1" dirty="0">
-              <a:solidFill>
-                <a:srgbClr val="111111"/>
-              </a:solidFill>
-              <a:latin typeface="Arimo" pitchFamily="34" charset="0"/>
-              <a:ea typeface="Arimo" pitchFamily="34" charset="-122"/>
-              <a:cs typeface="Arimo" pitchFamily="34" charset="-120"/>
-              <a:sym typeface="+mn-ea"/>
-            </a:endParaRPr>
-          </a:p>
-        </p:txBody>
-      </p:sp>
       <p:pic>
         <p:nvPicPr>
-          <p:cNvPr id="58" name="图片 57" descr="settings"/>
-          <p:cNvPicPr>
-            <a:picLocks noChangeAspect="1"/>
-          </p:cNvPicPr>
+          <p:cNvPr id="80" name="图片 57" descr="settings"/>
+          <p:cNvPicPr/>
           <p:nvPr/>
         </p:nvPicPr>
         <p:blipFill>
-          <a:blip r:embed="rId16"/>
+          <a:blip r:embed="rId8"/>
           <a:stretch>
             <a:fillRect/>
           </a:stretch>
         </p:blipFill>
         <p:spPr>
           <a:xfrm>
-            <a:off x="4908105" y="1544127"/>
-            <a:ext cx="230505" cy="230505"/>
+            <a:off x="4908240" y="1544040"/>
+            <a:ext cx="230040" cy="230040"/>
           </a:xfrm>
           <a:prstGeom prst="rect">
             <a:avLst/>
           </a:prstGeom>
+          <a:ln w="0">
+            <a:noFill/>
+          </a:ln>
         </p:spPr>
       </p:pic>
       <p:sp>
         <p:nvSpPr>
-          <p:cNvPr id="59" name="Text 27"/>
-          <p:cNvSpPr txBox="1"/>
-          <p:nvPr>
-            <p:custDataLst>
-              <p:tags r:id="rId17"/>
-            </p:custDataLst>
-          </p:nvPr>
-        </p:nvSpPr>
-        <p:spPr>
-          <a:xfrm>
-            <a:off x="4798250" y="1315527"/>
-            <a:ext cx="445770" cy="215900"/>
+          <p:cNvPr id="81" name="Text 27"/>
+          <p:cNvSpPr/>
+          <p:nvPr/>
+        </p:nvSpPr>
+        <p:spPr>
+          <a:xfrm>
+            <a:off x="4798080" y="1315440"/>
+            <a:ext cx="445320" cy="215640"/>
           </a:xfrm>
           <a:prstGeom prst="rect">
             <a:avLst/>
           </a:prstGeom>
           <a:noFill/>
-        </p:spPr>
+          <a:ln w="0">
+            <a:noFill/>
+          </a:ln>
+        </p:spPr>
+        <p:style>
+          <a:lnRef idx="0">
+            <a:srgbClr val="FFFFFF"/>
+          </a:lnRef>
+          <a:fillRef idx="0">
+            <a:srgbClr val="FFFFFF"/>
+          </a:fillRef>
+          <a:effectRef idx="0">
+            <a:srgbClr val="FFFFFF"/>
+          </a:effectRef>
+          <a:fontRef idx="minor"/>
+        </p:style>
         <p:txBody>
-          <a:bodyPr wrap="square" lIns="0" tIns="0" rIns="0" bIns="0" rtlCol="0" anchor="ctr">
+          <a:bodyPr lIns="0" tIns="0" rIns="0" bIns="0" anchor="ctr">
             <a:normAutofit/>
           </a:bodyPr>
-          <a:lstStyle/>
           <a:p>
-            <a:pPr lvl="0" algn="ctr">
-              <a:buClrTx/>
-              <a:buSzTx/>
-              <a:buFontTx/>
+            <a:pPr algn="ctr">
+              <a:lnSpc>
+                <a:spcPct val="100000"/>
+              </a:lnSpc>
+              <a:buNone/>
             </a:pPr>
             <a:r>
-              <a:rPr lang="en-US" sz="600" b="1" dirty="0">
+              <a:rPr lang="en-US" sz="600" b="1" strike="noStrike" spc="-1">
                 <a:solidFill>
-                  <a:schemeClr val="tx1">
-                    <a:lumMod val="50000"/>
-                    <a:lumOff val="50000"/>
-                  </a:schemeClr>
+                  <a:srgbClr val="808080"/>
                 </a:solidFill>
-                <a:latin typeface="Arimo" pitchFamily="34" charset="0"/>
-                <a:ea typeface="Arimo" pitchFamily="34" charset="-122"/>
-                <a:cs typeface="Arimo" pitchFamily="34" charset="-120"/>
-                <a:sym typeface="+mn-ea"/>
+                <a:latin typeface="Arial" panose="020B0604020202020204"/>
+                <a:ea typeface="Arial" panose="020B0604020202020204"/>
               </a:rPr>
-              <a:t>External interference</a:t>
-            </a:r>
-            <a:endParaRPr lang="en-US" sz="600" b="1" dirty="0">
-              <a:solidFill>
-                <a:schemeClr val="tx1">
-                  <a:lumMod val="50000"/>
-                  <a:lumOff val="50000"/>
-                </a:schemeClr>
-              </a:solidFill>
-              <a:latin typeface="Arimo" pitchFamily="34" charset="0"/>
-              <a:ea typeface="Arimo" pitchFamily="34" charset="-122"/>
-              <a:cs typeface="Arimo" pitchFamily="34" charset="-120"/>
-              <a:sym typeface="+mn-ea"/>
+              <a:t>External</a:t>
+            </a:r>
+            <a:endParaRPr lang="en-US" sz="600" b="0" strike="noStrike" spc="-1">
+              <a:latin typeface="Arial" panose="020B0604020202020204"/>
+            </a:endParaRPr>
+          </a:p>
+          <a:p>
+            <a:pPr algn="ctr">
+              <a:lnSpc>
+                <a:spcPct val="100000"/>
+              </a:lnSpc>
+              <a:buNone/>
+            </a:pPr>
+            <a:r>
+              <a:rPr lang="en-US" sz="600" b="1" strike="noStrike" spc="-1">
+                <a:solidFill>
+                  <a:srgbClr val="808080"/>
+                </a:solidFill>
+                <a:latin typeface="Arial" panose="020B0604020202020204"/>
+                <a:ea typeface="Arial" panose="020B0604020202020204"/>
+              </a:rPr>
+              <a:t>disturbance</a:t>
+            </a:r>
+            <a:endParaRPr lang="en-US" sz="600" b="0" strike="noStrike" spc="-1">
+              <a:latin typeface="Arial" panose="020B0604020202020204"/>
             </a:endParaRPr>
           </a:p>
         </p:txBody>
       </p:sp>
       <p:sp>
         <p:nvSpPr>
-          <p:cNvPr id="60" name="Text 27"/>
-          <p:cNvSpPr txBox="1"/>
-          <p:nvPr>
-            <p:custDataLst>
-              <p:tags r:id="rId18"/>
-            </p:custDataLst>
-          </p:nvPr>
-        </p:nvSpPr>
-        <p:spPr>
-          <a:xfrm>
-            <a:off x="5284660" y="1320607"/>
-            <a:ext cx="445770" cy="215900"/>
+          <p:cNvPr id="82" name="Text 27"/>
+          <p:cNvSpPr/>
+          <p:nvPr/>
+        </p:nvSpPr>
+        <p:spPr>
+          <a:xfrm>
+            <a:off x="5284800" y="1320480"/>
+            <a:ext cx="445320" cy="215640"/>
           </a:xfrm>
           <a:prstGeom prst="rect">
             <a:avLst/>
           </a:prstGeom>
           <a:noFill/>
-        </p:spPr>
+          <a:ln w="0">
+            <a:noFill/>
+          </a:ln>
+        </p:spPr>
+        <p:style>
+          <a:lnRef idx="0">
+            <a:srgbClr val="FFFFFF"/>
+          </a:lnRef>
+          <a:fillRef idx="0">
+            <a:srgbClr val="FFFFFF"/>
+          </a:fillRef>
+          <a:effectRef idx="0">
+            <a:srgbClr val="FFFFFF"/>
+          </a:effectRef>
+          <a:fontRef idx="minor"/>
+        </p:style>
         <p:txBody>
-          <a:bodyPr wrap="square" lIns="0" tIns="0" rIns="0" bIns="0" rtlCol="0" anchor="ctr">
+          <a:bodyPr lIns="0" tIns="0" rIns="0" bIns="0" anchor="ctr">
             <a:normAutofit/>
           </a:bodyPr>
-          <a:lstStyle/>
           <a:p>
-            <a:pPr lvl="0" algn="ctr">
-              <a:buClrTx/>
-              <a:buSzTx/>
-              <a:buFontTx/>
+            <a:pPr algn="ctr">
+              <a:lnSpc>
+                <a:spcPct val="100000"/>
+              </a:lnSpc>
+              <a:buNone/>
             </a:pPr>
             <a:r>
-              <a:rPr lang="en-US" sz="600" b="1" dirty="0">
+              <a:rPr lang="en-US" sz="600" b="1" strike="noStrike" spc="-1">
                 <a:solidFill>
-                  <a:schemeClr val="tx1">
-                    <a:lumMod val="50000"/>
-                    <a:lumOff val="50000"/>
-                  </a:schemeClr>
+                  <a:srgbClr val="808080"/>
                 </a:solidFill>
-                <a:latin typeface="Arimo" pitchFamily="34" charset="0"/>
-                <a:ea typeface="Arimo" pitchFamily="34" charset="-122"/>
-                <a:cs typeface="Arimo" pitchFamily="34" charset="-120"/>
-                <a:sym typeface="+mn-ea"/>
+                <a:latin typeface="Arial" panose="020B0604020202020204"/>
+                <a:ea typeface="Arial" panose="020B0604020202020204"/>
               </a:rPr>
               <a:t>Task </a:t>
             </a:r>
-            <a:endParaRPr lang="en-US" sz="600" b="1" dirty="0">
-              <a:solidFill>
-                <a:schemeClr val="tx1">
-                  <a:lumMod val="50000"/>
-                  <a:lumOff val="50000"/>
-                </a:schemeClr>
-              </a:solidFill>
-              <a:latin typeface="Arimo" pitchFamily="34" charset="0"/>
-              <a:ea typeface="Arimo" pitchFamily="34" charset="-122"/>
-              <a:cs typeface="Arimo" pitchFamily="34" charset="-120"/>
-              <a:sym typeface="+mn-ea"/>
+            <a:endParaRPr lang="en-US" sz="600" b="0" strike="noStrike" spc="-1">
+              <a:latin typeface="Arial" panose="020B0604020202020204"/>
             </a:endParaRPr>
           </a:p>
           <a:p>
-            <a:pPr lvl="0" algn="ctr">
-              <a:buClrTx/>
-              <a:buSzTx/>
-              <a:buFontTx/>
+            <a:pPr algn="ctr">
+              <a:lnSpc>
+                <a:spcPct val="100000"/>
+              </a:lnSpc>
+              <a:buNone/>
             </a:pPr>
             <a:r>
-              <a:rPr lang="en-US" sz="600" b="1" dirty="0">
+              <a:rPr lang="en-US" sz="600" b="1" strike="noStrike" spc="-1">
                 <a:solidFill>
-                  <a:schemeClr val="tx1">
-                    <a:lumMod val="50000"/>
-                    <a:lumOff val="50000"/>
-                  </a:schemeClr>
+                  <a:srgbClr val="808080"/>
                 </a:solidFill>
-                <a:latin typeface="Arimo" pitchFamily="34" charset="0"/>
-                <a:ea typeface="Arimo" pitchFamily="34" charset="-122"/>
-                <a:cs typeface="Arimo" pitchFamily="34" charset="-120"/>
-                <a:sym typeface="+mn-ea"/>
+                <a:latin typeface="Arial" panose="020B0604020202020204"/>
+                <a:ea typeface="Arial" panose="020B0604020202020204"/>
               </a:rPr>
               <a:t>Update</a:t>
             </a:r>
-            <a:endParaRPr lang="en-US" sz="600" b="1" dirty="0">
-              <a:solidFill>
-                <a:schemeClr val="tx1">
-                  <a:lumMod val="50000"/>
-                  <a:lumOff val="50000"/>
-                </a:schemeClr>
-              </a:solidFill>
-              <a:latin typeface="Arimo" pitchFamily="34" charset="0"/>
-              <a:ea typeface="Arimo" pitchFamily="34" charset="-122"/>
-              <a:cs typeface="Arimo" pitchFamily="34" charset="-120"/>
-              <a:sym typeface="+mn-ea"/>
+            <a:endParaRPr lang="en-US" sz="600" b="0" strike="noStrike" spc="-1">
+              <a:latin typeface="Arial" panose="020B0604020202020204"/>
             </a:endParaRPr>
           </a:p>
         </p:txBody>
       </p:sp>
-      <p:cxnSp>
-        <p:nvCxnSpPr>
-          <p:cNvPr id="62" name="曲线连接符 61"/>
-          <p:cNvCxnSpPr>
-            <a:stCxn id="7" idx="2"/>
-            <a:endCxn id="14" idx="0"/>
-          </p:cNvCxnSpPr>
-          <p:nvPr/>
-        </p:nvCxnSpPr>
+      <p:sp>
+        <p:nvSpPr>
+          <p:cNvPr id="83" name="曲线连接符 61"/>
+          <p:cNvSpPr/>
+          <p:nvPr/>
+        </p:nvSpPr>
         <p:spPr>
           <a:xfrm rot="5400000">
-            <a:off x="2679890" y="1144712"/>
-            <a:ext cx="370205" cy="3175"/>
+            <a:off x="2680200" y="1144440"/>
+            <a:ext cx="369720" cy="2880"/>
           </a:xfrm>
           <a:prstGeom prst="curvedConnector3">
             <a:avLst>
               <a:gd name="adj1" fmla="val 50086"/>
             </a:avLst>
           </a:prstGeom>
+          <a:noFill/>
+          <a:ln>
+            <a:solidFill>
+              <a:srgbClr val="000000"/>
+            </a:solidFill>
+          </a:ln>
         </p:spPr>
         <p:style>
           <a:lnRef idx="2">
-            <a:prstClr val="black"/>
+            <a:srgbClr val="FFFFFF"/>
           </a:lnRef>
           <a:fillRef idx="0">
             <a:srgbClr val="FFFFFF"/>
@@ -2649,34 +2974,35 @@
           <a:effectRef idx="0">
             <a:srgbClr val="FFFFFF"/>
           </a:effectRef>
-          <a:fontRef idx="minor">
-            <a:schemeClr val="tx1"/>
-          </a:fontRef>
+          <a:fontRef idx="minor"/>
         </p:style>
-      </p:cxnSp>
-      <p:cxnSp>
-        <p:nvCxnSpPr>
-          <p:cNvPr id="63" name="曲线连接符 62"/>
-          <p:cNvCxnSpPr>
-            <a:stCxn id="11" idx="3"/>
-            <a:endCxn id="14" idx="1"/>
-          </p:cNvCxnSpPr>
-          <p:nvPr/>
-        </p:nvCxnSpPr>
-        <p:spPr>
-          <a:xfrm>
-            <a:off x="1604010" y="720090"/>
-            <a:ext cx="494030" cy="798830"/>
+      </p:sp>
+      <p:sp>
+        <p:nvSpPr>
+          <p:cNvPr id="84" name="曲线连接符 62"/>
+          <p:cNvSpPr/>
+          <p:nvPr/>
+        </p:nvSpPr>
+        <p:spPr>
+          <a:xfrm>
+            <a:off x="1604160" y="720000"/>
+            <a:ext cx="493560" cy="798480"/>
           </a:xfrm>
           <a:prstGeom prst="curvedConnector3">
             <a:avLst>
               <a:gd name="adj1" fmla="val 50000"/>
             </a:avLst>
           </a:prstGeom>
+          <a:noFill/>
+          <a:ln>
+            <a:solidFill>
+              <a:srgbClr val="000000"/>
+            </a:solidFill>
+          </a:ln>
         </p:spPr>
         <p:style>
           <a:lnRef idx="2">
-            <a:prstClr val="black"/>
+            <a:srgbClr val="FFFFFF"/>
           </a:lnRef>
           <a:fillRef idx="0">
             <a:srgbClr val="FFFFFF"/>
@@ -2684,34 +3010,35 @@
           <a:effectRef idx="0">
             <a:srgbClr val="FFFFFF"/>
           </a:effectRef>
-          <a:fontRef idx="minor">
-            <a:schemeClr val="tx1"/>
-          </a:fontRef>
+          <a:fontRef idx="minor"/>
         </p:style>
-      </p:cxnSp>
-      <p:cxnSp>
-        <p:nvCxnSpPr>
-          <p:cNvPr id="64" name="曲线连接符 63"/>
-          <p:cNvCxnSpPr>
-            <a:stCxn id="17" idx="1"/>
-            <a:endCxn id="14" idx="3"/>
-          </p:cNvCxnSpPr>
-          <p:nvPr/>
-        </p:nvCxnSpPr>
+      </p:sp>
+      <p:sp>
+        <p:nvSpPr>
+          <p:cNvPr id="85" name="曲线连接符 63"/>
+          <p:cNvSpPr/>
+          <p:nvPr/>
+        </p:nvSpPr>
         <p:spPr>
           <a:xfrm rot="10800000" flipV="1">
-            <a:off x="3630930" y="730885"/>
-            <a:ext cx="560705" cy="788035"/>
+            <a:off x="3630960" y="731160"/>
+            <a:ext cx="560520" cy="787680"/>
           </a:xfrm>
           <a:prstGeom prst="curvedConnector3">
             <a:avLst>
               <a:gd name="adj1" fmla="val 49943"/>
             </a:avLst>
           </a:prstGeom>
+          <a:noFill/>
+          <a:ln>
+            <a:solidFill>
+              <a:srgbClr val="000000"/>
+            </a:solidFill>
+          </a:ln>
         </p:spPr>
         <p:style>
           <a:lnRef idx="2">
-            <a:prstClr val="black"/>
+            <a:srgbClr val="FFFFFF"/>
           </a:lnRef>
           <a:fillRef idx="0">
             <a:srgbClr val="FFFFFF"/>
@@ -2719,30 +3046,31 @@
           <a:effectRef idx="0">
             <a:srgbClr val="FFFFFF"/>
           </a:effectRef>
-          <a:fontRef idx="minor">
-            <a:schemeClr val="tx1"/>
-          </a:fontRef>
+          <a:fontRef idx="minor"/>
         </p:style>
-      </p:cxnSp>
-      <p:cxnSp>
-        <p:nvCxnSpPr>
-          <p:cNvPr id="69" name="曲线连接符 68"/>
-          <p:cNvCxnSpPr>
-            <a:stCxn id="30" idx="0"/>
-            <a:endCxn id="17" idx="2"/>
-          </p:cNvCxnSpPr>
-          <p:nvPr/>
-        </p:nvCxnSpPr>
+      </p:sp>
+      <p:sp>
+        <p:nvSpPr>
+          <p:cNvPr id="86" name="曲线连接符 68"/>
+          <p:cNvSpPr/>
+          <p:nvPr/>
+        </p:nvSpPr>
         <p:spPr>
           <a:xfrm rot="16200000">
-            <a:off x="4509135" y="959485"/>
-            <a:ext cx="354330" cy="358140"/>
+            <a:off x="4509000" y="959760"/>
+            <a:ext cx="353880" cy="357840"/>
           </a:xfrm>
           <a:prstGeom prst="curvedConnector3">
             <a:avLst>
               <a:gd name="adj1" fmla="val 50000"/>
             </a:avLst>
           </a:prstGeom>
+          <a:noFill/>
+          <a:ln>
+            <a:solidFill>
+              <a:srgbClr val="A5A5A5"/>
+            </a:solidFill>
+          </a:ln>
         </p:spPr>
         <p:style>
           <a:lnRef idx="2">
@@ -2754,29 +3082,31 @@
           <a:effectRef idx="0">
             <a:srgbClr val="FFFFFF"/>
           </a:effectRef>
-          <a:fontRef idx="minor">
-            <a:schemeClr val="tx1"/>
-          </a:fontRef>
+          <a:fontRef idx="minor"/>
         </p:style>
-      </p:cxnSp>
-      <p:cxnSp>
-        <p:nvCxnSpPr>
-          <p:cNvPr id="70" name="曲线连接符 69"/>
-          <p:cNvCxnSpPr>
-            <a:stCxn id="59" idx="0"/>
-          </p:cNvCxnSpPr>
-          <p:nvPr/>
-        </p:nvCxnSpPr>
+      </p:sp>
+      <p:sp>
+        <p:nvSpPr>
+          <p:cNvPr id="87" name="曲线连接符 69"/>
+          <p:cNvSpPr/>
+          <p:nvPr/>
+        </p:nvSpPr>
         <p:spPr>
           <a:xfrm rot="16200000" flipV="1">
-            <a:off x="4766310" y="1061720"/>
-            <a:ext cx="352425" cy="155575"/>
+            <a:off x="4766400" y="1061640"/>
+            <a:ext cx="352080" cy="155160"/>
           </a:xfrm>
           <a:prstGeom prst="curvedConnector3">
             <a:avLst>
               <a:gd name="adj1" fmla="val 49910"/>
             </a:avLst>
           </a:prstGeom>
+          <a:noFill/>
+          <a:ln>
+            <a:solidFill>
+              <a:srgbClr val="A5A5A5"/>
+            </a:solidFill>
+          </a:ln>
         </p:spPr>
         <p:style>
           <a:lnRef idx="2">
@@ -2788,27 +3118,29 @@
           <a:effectRef idx="0">
             <a:srgbClr val="FFFFFF"/>
           </a:effectRef>
-          <a:fontRef idx="minor">
-            <a:schemeClr val="tx1"/>
-          </a:fontRef>
+          <a:fontRef idx="minor"/>
         </p:style>
-      </p:cxnSp>
-      <p:cxnSp>
-        <p:nvCxnSpPr>
-          <p:cNvPr id="71" name="曲线连接符 70"/>
-          <p:cNvCxnSpPr>
-            <a:stCxn id="60" idx="0"/>
-          </p:cNvCxnSpPr>
-          <p:nvPr/>
-        </p:nvCxnSpPr>
+      </p:sp>
+      <p:sp>
+        <p:nvSpPr>
+          <p:cNvPr id="88" name="曲线连接符 70"/>
+          <p:cNvSpPr/>
+          <p:nvPr/>
+        </p:nvSpPr>
         <p:spPr>
           <a:xfrm rot="16200000" flipV="1">
-            <a:off x="5006975" y="820420"/>
-            <a:ext cx="357505" cy="642620"/>
+            <a:off x="5007240" y="820440"/>
+            <a:ext cx="357120" cy="642240"/>
           </a:xfrm>
           <a:prstGeom prst="curvedConnector2">
             <a:avLst/>
           </a:prstGeom>
+          <a:noFill/>
+          <a:ln>
+            <a:solidFill>
+              <a:srgbClr val="A5A5A5"/>
+            </a:solidFill>
+          </a:ln>
         </p:spPr>
         <p:style>
           <a:lnRef idx="2">
@@ -2820,25 +3152,19 @@
           <a:effectRef idx="0">
             <a:srgbClr val="FFFFFF"/>
           </a:effectRef>
-          <a:fontRef idx="minor">
-            <a:schemeClr val="tx1"/>
-          </a:fontRef>
+          <a:fontRef idx="minor"/>
         </p:style>
-      </p:cxnSp>
-      <p:sp>
-        <p:nvSpPr>
-          <p:cNvPr id="76" name="Rounded Rectangular Callout 75"/>
+      </p:sp>
+      <p:sp>
+        <p:nvSpPr>
+          <p:cNvPr id="89" name="Rounded Rectangular Callout 75"/>
           <p:cNvSpPr/>
-          <p:nvPr>
-            <p:custDataLst>
-              <p:tags r:id="rId19"/>
-            </p:custDataLst>
-          </p:nvPr>
+          <p:nvPr/>
         </p:nvSpPr>
         <p:spPr>
           <a:xfrm rot="10320000" flipH="1">
-            <a:off x="2291080" y="3674110"/>
-            <a:ext cx="1083310" cy="483870"/>
+            <a:off x="2291400" y="3674160"/>
+            <a:ext cx="1082880" cy="483480"/>
           </a:xfrm>
           <a:prstGeom prst="cloudCallout">
             <a:avLst>
@@ -2865,33 +3191,88 @@
           <a:effectRef idx="2">
             <a:schemeClr val="accent1"/>
           </a:effectRef>
-          <a:fontRef idx="minor">
-            <a:schemeClr val="lt1"/>
-          </a:fontRef>
+          <a:fontRef idx="minor"/>
         </p:style>
-        <p:txBody>
-          <a:bodyPr lIns="64008" rIns="64008" bIns="41148" rtlCol="0" anchor="ctr"/>
-          <a:p>
-            <a:pPr algn="ctr">
-              <a:spcBef>
-                <a:spcPts val="0"/>
-              </a:spcBef>
-              <a:spcAft>
-                <a:spcPts val="0"/>
-              </a:spcAft>
-            </a:pPr>
-            <a:endParaRPr sz="870" b="0" i="1">
-              <a:solidFill>
-                <a:srgbClr val="42464C"/>
-              </a:solidFill>
-              <a:latin typeface="Arial" panose="020B0604020202090204"/>
-            </a:endParaRPr>
-          </a:p>
-        </p:txBody>
-      </p:sp>
-      <p:sp>
-        <p:nvSpPr>
-          <p:cNvPr id="72" name="矩形 71"/>
+      </p:sp>
+      <p:sp>
+        <p:nvSpPr>
+          <p:cNvPr id="91" name="矩形 25"/>
+          <p:cNvSpPr/>
+          <p:nvPr/>
+        </p:nvSpPr>
+        <p:spPr>
+          <a:xfrm rot="20880000">
+            <a:off x="2279880" y="3692520"/>
+            <a:ext cx="1180080" cy="393840"/>
+          </a:xfrm>
+          <a:prstGeom prst="rect">
+            <a:avLst/>
+          </a:prstGeom>
+          <a:noFill/>
+          <a:ln w="0">
+            <a:noFill/>
+          </a:ln>
+          <a:effectLst>
+            <a:glow rad="1663560">
+              <a:srgbClr val="4472C4">
+                <a:alpha val="40000"/>
+              </a:srgbClr>
+            </a:glow>
+          </a:effectLst>
+        </p:spPr>
+        <p:style>
+          <a:lnRef idx="0">
+            <a:srgbClr val="FFFFFF"/>
+          </a:lnRef>
+          <a:fillRef idx="0">
+            <a:srgbClr val="FFFFFF"/>
+          </a:fillRef>
+          <a:effectRef idx="0">
+            <a:srgbClr val="FFFFFF"/>
+          </a:effectRef>
+          <a:fontRef idx="minor"/>
+        </p:style>
+      </p:sp>
+      <p:sp>
+        <p:nvSpPr>
+          <p:cNvPr id="93" name="Right Arrow 71"/>
+          <p:cNvSpPr/>
+          <p:nvPr/>
+        </p:nvSpPr>
+        <p:spPr>
+          <a:xfrm rot="480000">
+            <a:off x="2679120" y="3044520"/>
+            <a:ext cx="959760" cy="118440"/>
+          </a:xfrm>
+          <a:prstGeom prst="rightArrow">
+            <a:avLst>
+              <a:gd name="adj1" fmla="val 28000"/>
+              <a:gd name="adj2" fmla="val 70000"/>
+            </a:avLst>
+          </a:prstGeom>
+          <a:solidFill>
+            <a:srgbClr val="375687"/>
+          </a:solidFill>
+          <a:ln>
+            <a:noFill/>
+          </a:ln>
+        </p:spPr>
+        <p:style>
+          <a:lnRef idx="1">
+            <a:schemeClr val="accent1"/>
+          </a:lnRef>
+          <a:fillRef idx="3">
+            <a:schemeClr val="accent1"/>
+          </a:fillRef>
+          <a:effectRef idx="2">
+            <a:schemeClr val="accent1"/>
+          </a:effectRef>
+          <a:fontRef idx="minor"/>
+        </p:style>
+      </p:sp>
+      <p:sp>
+        <p:nvSpPr>
+          <p:cNvPr id="2" name="矩形 1"/>
           <p:cNvSpPr/>
           <p:nvPr/>
         </p:nvSpPr>
@@ -3035,76 +3416,11 @@
       </p:sp>
       <p:sp>
         <p:nvSpPr>
-          <p:cNvPr id="26" name="矩形 25"/>
-          <p:cNvSpPr/>
-          <p:nvPr/>
-        </p:nvSpPr>
-        <p:spPr>
-          <a:xfrm rot="20880000">
-            <a:off x="2280285" y="3692525"/>
-            <a:ext cx="1180465" cy="394335"/>
-          </a:xfrm>
-          <a:prstGeom prst="rect">
-            <a:avLst/>
-          </a:prstGeom>
-          <a:noFill/>
-          <a:ln>
-            <a:noFill/>
-          </a:ln>
-          <a:effectLst>
-            <a:glow rad="1663700">
-              <a:schemeClr val="accent1">
-                <a:alpha val="40000"/>
-              </a:schemeClr>
-            </a:glow>
-          </a:effectLst>
-        </p:spPr>
-        <p:txBody>
-          <a:bodyPr wrap="none" rtlCol="0" anchor="t">
-            <a:noAutofit/>
-            <a:scene3d>
-              <a:camera prst="orthographicFront"/>
-              <a:lightRig rig="threePt" dir="t"/>
-            </a:scene3d>
-          </a:bodyPr>
-          <a:p>
-            <a:pPr lvl="0" algn="ctr">
-              <a:buClrTx/>
-              <a:buSzTx/>
-              <a:buFontTx/>
-            </a:pPr>
-            <a:endParaRPr lang="en-US" altLang="zh-CN" sz="1000" i="1">
-              <a:ln w="13462">
-                <a:solidFill>
-                  <a:schemeClr val="bg1"/>
-                </a:solidFill>
-                <a:prstDash val="solid"/>
-              </a:ln>
-              <a:solidFill>
-                <a:schemeClr val="tx1">
-                  <a:lumMod val="85000"/>
-                  <a:lumOff val="15000"/>
-                  <a:lumMod val="85000"/>
-                  <a:lumOff val="15000"/>
-                </a:schemeClr>
-              </a:solidFill>
-              <a:effectLst>
-                <a:outerShdw dist="38100" dir="2700000" algn="bl" rotWithShape="0">
-                  <a:schemeClr val="accent5"/>
-                </a:outerShdw>
-              </a:effectLst>
-              <a:sym typeface="+mn-ea"/>
-            </a:endParaRPr>
-          </a:p>
-        </p:txBody>
-      </p:sp>
-      <p:sp>
-        <p:nvSpPr>
-          <p:cNvPr id="73" name="矩形 72"/>
+          <p:cNvPr id="3" name="矩形 2"/>
           <p:cNvSpPr/>
           <p:nvPr>
             <p:custDataLst>
-              <p:tags r:id="rId20"/>
+              <p:tags r:id="rId9"/>
             </p:custDataLst>
           </p:nvPr>
         </p:nvSpPr>
@@ -3323,57 +3639,42 @@
       </p:sp>
       <p:sp>
         <p:nvSpPr>
-          <p:cNvPr id="2" name="Right Arrow 71"/>
-          <p:cNvSpPr/>
-          <p:nvPr>
-            <p:custDataLst>
-              <p:tags r:id="rId21"/>
-            </p:custDataLst>
-          </p:nvPr>
-        </p:nvSpPr>
-        <p:spPr>
-          <a:xfrm rot="480000">
-            <a:off x="2679192" y="3044952"/>
-            <a:ext cx="960120" cy="118872"/>
-          </a:xfrm>
-          <a:prstGeom prst="rightArrow">
-            <a:avLst>
-              <a:gd name="adj1" fmla="val 28000"/>
-              <a:gd name="adj2" fmla="val 70000"/>
-            </a:avLst>
-          </a:prstGeom>
-          <a:solidFill>
-            <a:srgbClr val="375687"/>
-          </a:solidFill>
-          <a:ln>
-            <a:noFill/>
-          </a:ln>
-        </p:spPr>
-        <p:style>
-          <a:lnRef idx="1">
-            <a:schemeClr val="accent1"/>
-          </a:lnRef>
-          <a:fillRef idx="3">
-            <a:schemeClr val="accent1"/>
-          </a:fillRef>
-          <a:effectRef idx="2">
-            <a:schemeClr val="accent1"/>
-          </a:effectRef>
-          <a:fontRef idx="minor">
-            <a:schemeClr val="lt1"/>
-          </a:fontRef>
-        </p:style>
+          <p:cNvPr id="33" name="文本框 32"/>
+          <p:cNvSpPr txBox="1"/>
+          <p:nvPr/>
+        </p:nvSpPr>
+        <p:spPr>
+          <a:xfrm rot="21300000">
+            <a:off x="2440305" y="3723640"/>
+            <a:ext cx="1242695" cy="358140"/>
+          </a:xfrm>
+          <a:prstGeom prst="rect">
+            <a:avLst/>
+          </a:prstGeom>
+          <a:noFill/>
+        </p:spPr>
         <p:txBody>
-          <a:bodyPr rtlCol="0" anchor="ctr"/>
+          <a:bodyPr wrap="square" rtlCol="0">
+            <a:spAutoFit/>
+          </a:bodyPr>
           <a:p>
-            <a:pPr algn="ctr">
-              <a:spcBef>
-                <a:spcPts val="0"/>
-              </a:spcBef>
-              <a:spcAft>
-                <a:spcPts val="0"/>
-              </a:spcAft>
-            </a:pPr>
+            <a:r>
+              <a:rPr sz="870" i="1">
+                <a:solidFill>
+                  <a:srgbClr val="42464C"/>
+                </a:solidFill>
+                <a:latin typeface="Arial" panose="020B0604020202020204"/>
+                <a:sym typeface="+mn-ea"/>
+              </a:rPr>
+              <a:t>Sorry for
+dropping that～</a:t>
+            </a:r>
+            <a:endParaRPr sz="870" i="1">
+              <a:solidFill>
+                <a:srgbClr val="42464C"/>
+              </a:solidFill>
+              <a:latin typeface="Arial" panose="020B0604020202020204"/>
+            </a:endParaRPr>
           </a:p>
         </p:txBody>
       </p:sp>
@@ -3383,13 +3684,13 @@
           <p:cNvSpPr txBox="1"/>
           <p:nvPr>
             <p:custDataLst>
-              <p:tags r:id="rId22"/>
+              <p:tags r:id="rId10"/>
             </p:custDataLst>
           </p:nvPr>
         </p:nvSpPr>
         <p:spPr>
           <a:xfrm rot="480000">
-            <a:off x="2596896" y="2825496"/>
+            <a:off x="2596896" y="2862961"/>
             <a:ext cx="1234440" cy="219456"/>
           </a:xfrm>
           <a:prstGeom prst="rect">
@@ -3415,7 +3716,7 @@
                 <a:solidFill>
                   <a:srgbClr val="375687"/>
                 </a:solidFill>
-                <a:latin typeface="Arial" panose="020B0604020202090204"/>
+                <a:latin typeface="Arial" panose="020B0604020202020204"/>
               </a:rPr>
               <a:t>Conveyor Moving</a:t>
             </a:r>
@@ -3423,48 +3724,7 @@
               <a:solidFill>
                 <a:srgbClr val="375687"/>
               </a:solidFill>
-              <a:latin typeface="Arial" panose="020B0604020202090204"/>
-            </a:endParaRPr>
-          </a:p>
-        </p:txBody>
-      </p:sp>
-      <p:sp>
-        <p:nvSpPr>
-          <p:cNvPr id="33" name="文本框 32"/>
-          <p:cNvSpPr txBox="1"/>
-          <p:nvPr/>
-        </p:nvSpPr>
-        <p:spPr>
-          <a:xfrm rot="21300000">
-            <a:off x="2440305" y="3723640"/>
-            <a:ext cx="1242695" cy="358140"/>
-          </a:xfrm>
-          <a:prstGeom prst="rect">
-            <a:avLst/>
-          </a:prstGeom>
-          <a:noFill/>
-        </p:spPr>
-        <p:txBody>
-          <a:bodyPr wrap="square" rtlCol="0">
-            <a:spAutoFit/>
-          </a:bodyPr>
-          <a:p>
-            <a:r>
-              <a:rPr sz="870" i="1">
-                <a:solidFill>
-                  <a:srgbClr val="42464C"/>
-                </a:solidFill>
-                <a:latin typeface="Arial" panose="020B0604020202090204"/>
-                <a:sym typeface="+mn-ea"/>
-              </a:rPr>
-              <a:t>Sorry for
-dropping that～</a:t>
-            </a:r>
-            <a:endParaRPr sz="870" i="1">
-              <a:solidFill>
-                <a:srgbClr val="42464C"/>
-              </a:solidFill>
-              <a:latin typeface="Arial" panose="020B0604020202090204"/>
+              <a:latin typeface="Arial" panose="020B0604020202020204"/>
             </a:endParaRPr>
           </a:p>
         </p:txBody>
@@ -3474,6 +3734,14 @@
   <p:clrMapOvr>
     <a:masterClrMapping/>
   </p:clrMapOvr>
+  <mc:AlternateContent xmlns:mc="http://schemas.openxmlformats.org/markup-compatibility/2006">
+    <mc:Choice xmlns:p14="http://schemas.microsoft.com/office/powerpoint/2010/main" Requires="p14">
+      <p:transition spd="slow" p14:dur="2000"/>
+    </mc:Choice>
+    <mc:Fallback>
+      <p:transition spd="slow"/>
+    </mc:Fallback>
+  </mc:AlternateContent>
 </p:sld>
 </file>
 
@@ -3483,79 +3751,7 @@
 </p:tagLst>
 </file>
 
-<file path=ppt/tags/tag10.xml><?xml version="1.0" encoding="utf-8"?>
-<p:tagLst xmlns:p="http://schemas.openxmlformats.org/presentationml/2006/main">
-  <p:tag name="KSO_WM_BEAUTIFY_FLAG" val=""/>
-</p:tagLst>
-</file>
-
-<file path=ppt/tags/tag11.xml><?xml version="1.0" encoding="utf-8"?>
-<p:tagLst xmlns:p="http://schemas.openxmlformats.org/presentationml/2006/main">
-  <p:tag name="KSO_WM_BEAUTIFY_FLAG" val=""/>
-</p:tagLst>
-</file>
-
-<file path=ppt/tags/tag12.xml><?xml version="1.0" encoding="utf-8"?>
-<p:tagLst xmlns:p="http://schemas.openxmlformats.org/presentationml/2006/main">
-  <p:tag name="KSO_WM_BEAUTIFY_FLAG" val=""/>
-</p:tagLst>
-</file>
-
-<file path=ppt/tags/tag13.xml><?xml version="1.0" encoding="utf-8"?>
-<p:tagLst xmlns:p="http://schemas.openxmlformats.org/presentationml/2006/main">
-  <p:tag name="KSO_WM_BEAUTIFY_FLAG" val=""/>
-</p:tagLst>
-</file>
-
-<file path=ppt/tags/tag14.xml><?xml version="1.0" encoding="utf-8"?>
-<p:tagLst xmlns:p="http://schemas.openxmlformats.org/presentationml/2006/main">
-  <p:tag name="KSO_WM_BEAUTIFY_FLAG" val=""/>
-</p:tagLst>
-</file>
-
 <file path=ppt/tags/tag2.xml><?xml version="1.0" encoding="utf-8"?>
-<p:tagLst xmlns:p="http://schemas.openxmlformats.org/presentationml/2006/main">
-  <p:tag name="KSO_WM_BEAUTIFY_FLAG" val=""/>
-</p:tagLst>
-</file>
-
-<file path=ppt/tags/tag3.xml><?xml version="1.0" encoding="utf-8"?>
-<p:tagLst xmlns:p="http://schemas.openxmlformats.org/presentationml/2006/main">
-  <p:tag name="KSO_WM_BEAUTIFY_FLAG" val=""/>
-</p:tagLst>
-</file>
-
-<file path=ppt/tags/tag4.xml><?xml version="1.0" encoding="utf-8"?>
-<p:tagLst xmlns:p="http://schemas.openxmlformats.org/presentationml/2006/main">
-  <p:tag name="KSO_WM_BEAUTIFY_FLAG" val=""/>
-</p:tagLst>
-</file>
-
-<file path=ppt/tags/tag5.xml><?xml version="1.0" encoding="utf-8"?>
-<p:tagLst xmlns:p="http://schemas.openxmlformats.org/presentationml/2006/main">
-  <p:tag name="KSO_WM_BEAUTIFY_FLAG" val=""/>
-</p:tagLst>
-</file>
-
-<file path=ppt/tags/tag6.xml><?xml version="1.0" encoding="utf-8"?>
-<p:tagLst xmlns:p="http://schemas.openxmlformats.org/presentationml/2006/main">
-  <p:tag name="KSO_WM_BEAUTIFY_FLAG" val=""/>
-</p:tagLst>
-</file>
-
-<file path=ppt/tags/tag7.xml><?xml version="1.0" encoding="utf-8"?>
-<p:tagLst xmlns:p="http://schemas.openxmlformats.org/presentationml/2006/main">
-  <p:tag name="KSO_WM_BEAUTIFY_FLAG" val=""/>
-</p:tagLst>
-</file>
-
-<file path=ppt/tags/tag8.xml><?xml version="1.0" encoding="utf-8"?>
-<p:tagLst xmlns:p="http://schemas.openxmlformats.org/presentationml/2006/main">
-  <p:tag name="KSO_WM_BEAUTIFY_FLAG" val=""/>
-</p:tagLst>
-</file>
-
-<file path=ppt/tags/tag9.xml><?xml version="1.0" encoding="utf-8"?>
 <p:tagLst xmlns:p="http://schemas.openxmlformats.org/presentationml/2006/main">
   <p:tag name="KSO_WM_BEAUTIFY_FLAG" val=""/>
 </p:tagLst>
